--- a/快樂人.pptx
+++ b/快樂人.pptx
@@ -2,15 +2,18 @@
 <file path=ppt/presentation.xml><?xml version="1.0" encoding="utf-8"?>
 <p:presentation xmlns:a="http://schemas.openxmlformats.org/drawingml/2006/main" xmlns:r="http://schemas.openxmlformats.org/officeDocument/2006/relationships" xmlns:p="http://schemas.openxmlformats.org/presentationml/2006/main" saveSubsetFonts="1">
   <p:sldMasterIdLst>
-    <p:sldMasterId id="2147483660" r:id="rId1"/>
+    <p:sldMasterId id="2147483672" r:id="rId1"/>
   </p:sldMasterIdLst>
   <p:sldIdLst>
-    <p:sldId id="256" r:id="rId2"/>
-    <p:sldId id="257" r:id="rId3"/>
-    <p:sldId id="258" r:id="rId4"/>
-    <p:sldId id="259" r:id="rId5"/>
+    <p:sldId id="353" r:id="rId2"/>
+    <p:sldId id="390" r:id="rId3"/>
+    <p:sldId id="391" r:id="rId4"/>
+    <p:sldId id="392" r:id="rId5"/>
+    <p:sldId id="394" r:id="rId6"/>
+    <p:sldId id="395" r:id="rId7"/>
+    <p:sldId id="396" r:id="rId8"/>
   </p:sldIdLst>
-  <p:sldSz cx="9144000" cy="6858000" type="screen4x3"/>
+  <p:sldSz cx="12192000" cy="6858000"/>
   <p:notesSz cx="6858000" cy="9144000"/>
   <p:defaultTextStyle>
     <a:defPPr>
@@ -107,6 +110,22 @@
       </a:defRPr>
     </a:lvl9pPr>
   </p:defaultTextStyle>
+  <p:extLst>
+    <p:ext uri="{EFAFB233-063F-42B5-8137-9DF3F51BA10A}">
+      <p15:sldGuideLst xmlns:p15="http://schemas.microsoft.com/office/powerpoint/2012/main">
+        <p15:guide id="1" orient="horz" pos="2160" userDrawn="1">
+          <p15:clr>
+            <a:srgbClr val="A4A3A4"/>
+          </p15:clr>
+        </p15:guide>
+        <p15:guide id="2" pos="3840" userDrawn="1">
+          <p15:clr>
+            <a:srgbClr val="A4A3A4"/>
+          </p15:clr>
+        </p15:guide>
+      </p15:sldGuideLst>
+    </p:ext>
+  </p:extLst>
 </p:presentation>
 </file>
 
@@ -129,7 +148,7 @@
       </p:grpSpPr>
       <p:sp>
         <p:nvSpPr>
-          <p:cNvPr id="2" name="Title 1"/>
+          <p:cNvPr id="2" name="標題 1"/>
           <p:cNvSpPr>
             <a:spLocks noGrp="1"/>
           </p:cNvSpPr>
@@ -139,8 +158,8 @@
         </p:nvSpPr>
         <p:spPr>
           <a:xfrm>
-            <a:off x="685800" y="2130425"/>
-            <a:ext cx="7772400" cy="1470025"/>
+            <a:off x="914400" y="2130428"/>
+            <a:ext cx="10363200" cy="1470025"/>
           </a:xfrm>
         </p:spPr>
         <p:txBody>
@@ -148,16 +167,16 @@
           <a:lstStyle/>
           <a:p>
             <a:r>
-              <a:rPr lang="zh-TW" altLang="en-US" smtClean="0"/>
-              <a:t>按一下以編輯母片標題樣式</a:t>
-            </a:r>
-            <a:endParaRPr lang="en-US"/>
-          </a:p>
-        </p:txBody>
-      </p:sp>
-      <p:sp>
-        <p:nvSpPr>
-          <p:cNvPr id="3" name="Subtitle 2"/>
+              <a:rPr lang="en-US" altLang="zh-TW"/>
+              <a:t>Click to edit Master title style</a:t>
+            </a:r>
+            <a:endParaRPr lang="zh-TW" altLang="en-US"/>
+          </a:p>
+        </p:txBody>
+      </p:sp>
+      <p:sp>
+        <p:nvSpPr>
+          <p:cNvPr id="3" name="副標題 2"/>
           <p:cNvSpPr>
             <a:spLocks noGrp="1"/>
           </p:cNvSpPr>
@@ -167,8 +186,8 @@
         </p:nvSpPr>
         <p:spPr>
           <a:xfrm>
-            <a:off x="1371600" y="3886200"/>
-            <a:ext cx="6400800" cy="1752600"/>
+            <a:off x="1828800" y="3886200"/>
+            <a:ext cx="8534400" cy="1752600"/>
           </a:xfrm>
         </p:spPr>
         <p:txBody>
@@ -184,7 +203,7 @@
                 </a:solidFill>
               </a:defRPr>
             </a:lvl1pPr>
-            <a:lvl2pPr marL="457200" indent="0" algn="ctr">
+            <a:lvl2pPr marL="609585" indent="0" algn="ctr">
               <a:buNone/>
               <a:defRPr>
                 <a:solidFill>
@@ -194,7 +213,7 @@
                 </a:solidFill>
               </a:defRPr>
             </a:lvl2pPr>
-            <a:lvl3pPr marL="914400" indent="0" algn="ctr">
+            <a:lvl3pPr marL="1219170" indent="0" algn="ctr">
               <a:buNone/>
               <a:defRPr>
                 <a:solidFill>
@@ -204,7 +223,7 @@
                 </a:solidFill>
               </a:defRPr>
             </a:lvl3pPr>
-            <a:lvl4pPr marL="1371600" indent="0" algn="ctr">
+            <a:lvl4pPr marL="1828754" indent="0" algn="ctr">
               <a:buNone/>
               <a:defRPr>
                 <a:solidFill>
@@ -214,7 +233,7 @@
                 </a:solidFill>
               </a:defRPr>
             </a:lvl4pPr>
-            <a:lvl5pPr marL="1828800" indent="0" algn="ctr">
+            <a:lvl5pPr marL="2438339" indent="0" algn="ctr">
               <a:buNone/>
               <a:defRPr>
                 <a:solidFill>
@@ -224,7 +243,7 @@
                 </a:solidFill>
               </a:defRPr>
             </a:lvl5pPr>
-            <a:lvl6pPr marL="2286000" indent="0" algn="ctr">
+            <a:lvl6pPr marL="3047924" indent="0" algn="ctr">
               <a:buNone/>
               <a:defRPr>
                 <a:solidFill>
@@ -234,7 +253,7 @@
                 </a:solidFill>
               </a:defRPr>
             </a:lvl6pPr>
-            <a:lvl7pPr marL="2743200" indent="0" algn="ctr">
+            <a:lvl7pPr marL="3657509" indent="0" algn="ctr">
               <a:buNone/>
               <a:defRPr>
                 <a:solidFill>
@@ -244,7 +263,7 @@
                 </a:solidFill>
               </a:defRPr>
             </a:lvl7pPr>
-            <a:lvl8pPr marL="3200400" indent="0" algn="ctr">
+            <a:lvl8pPr marL="4267093" indent="0" algn="ctr">
               <a:buNone/>
               <a:defRPr>
                 <a:solidFill>
@@ -254,7 +273,7 @@
                 </a:solidFill>
               </a:defRPr>
             </a:lvl8pPr>
-            <a:lvl9pPr marL="3657600" indent="0" algn="ctr">
+            <a:lvl9pPr marL="4876678" indent="0" algn="ctr">
               <a:buNone/>
               <a:defRPr>
                 <a:solidFill>
@@ -267,16 +286,16 @@
           </a:lstStyle>
           <a:p>
             <a:r>
-              <a:rPr lang="zh-TW" altLang="en-US" smtClean="0"/>
-              <a:t>按一下以編輯母片副標題樣式</a:t>
-            </a:r>
-            <a:endParaRPr lang="en-US"/>
-          </a:p>
-        </p:txBody>
-      </p:sp>
-      <p:sp>
-        <p:nvSpPr>
-          <p:cNvPr id="4" name="Date Placeholder 3"/>
+              <a:rPr lang="en-US" altLang="zh-TW"/>
+              <a:t>Click to edit Master subtitle style</a:t>
+            </a:r>
+            <a:endParaRPr lang="zh-TW" altLang="en-US"/>
+          </a:p>
+        </p:txBody>
+      </p:sp>
+      <p:sp>
+        <p:nvSpPr>
+          <p:cNvPr id="4" name="日期版面配置區 3"/>
           <p:cNvSpPr>
             <a:spLocks noGrp="1"/>
           </p:cNvSpPr>
@@ -291,7 +310,7 @@
           <a:p>
             <a:fld id="{06D6E6CC-32A2-4F62-A69C-65BBAE7E02EA}" type="datetimeFigureOut">
               <a:rPr lang="zh-TW" altLang="en-US" smtClean="0"/>
-              <a:t>2014/5/3</a:t>
+              <a:t>2026/2/16</a:t>
             </a:fld>
             <a:endParaRPr lang="zh-TW" altLang="en-US"/>
           </a:p>
@@ -299,7 +318,7 @@
       </p:sp>
       <p:sp>
         <p:nvSpPr>
-          <p:cNvPr id="5" name="Footer Placeholder 4"/>
+          <p:cNvPr id="5" name="頁尾版面配置區 4"/>
           <p:cNvSpPr>
             <a:spLocks noGrp="1"/>
           </p:cNvSpPr>
@@ -318,7 +337,7 @@
       </p:sp>
       <p:sp>
         <p:nvSpPr>
-          <p:cNvPr id="6" name="Slide Number Placeholder 5"/>
+          <p:cNvPr id="6" name="投影片編號版面配置區 5"/>
           <p:cNvSpPr>
             <a:spLocks noGrp="1"/>
           </p:cNvSpPr>
@@ -340,6 +359,11 @@
         </p:txBody>
       </p:sp>
     </p:spTree>
+    <p:extLst>
+      <p:ext uri="{BB962C8B-B14F-4D97-AF65-F5344CB8AC3E}">
+        <p14:creationId xmlns:p14="http://schemas.microsoft.com/office/powerpoint/2010/main" val="1997418325"/>
+      </p:ext>
+    </p:extLst>
   </p:cSld>
   <p:clrMapOvr>
     <a:masterClrMapping/>
@@ -366,7 +390,7 @@
       </p:grpSpPr>
       <p:sp>
         <p:nvSpPr>
-          <p:cNvPr id="2" name="Title 1"/>
+          <p:cNvPr id="2" name="標題 1"/>
           <p:cNvSpPr>
             <a:spLocks noGrp="1"/>
           </p:cNvSpPr>
@@ -380,16 +404,16 @@
           <a:lstStyle/>
           <a:p>
             <a:r>
-              <a:rPr lang="zh-TW" altLang="en-US" smtClean="0"/>
-              <a:t>按一下以編輯母片標題樣式</a:t>
-            </a:r>
-            <a:endParaRPr lang="en-US"/>
-          </a:p>
-        </p:txBody>
-      </p:sp>
-      <p:sp>
-        <p:nvSpPr>
-          <p:cNvPr id="3" name="Vertical Text Placeholder 2"/>
+              <a:rPr lang="en-US" altLang="zh-TW"/>
+              <a:t>Click to edit Master title style</a:t>
+            </a:r>
+            <a:endParaRPr lang="zh-TW" altLang="en-US"/>
+          </a:p>
+        </p:txBody>
+      </p:sp>
+      <p:sp>
+        <p:nvSpPr>
+          <p:cNvPr id="3" name="直排文字版面配置區 2"/>
           <p:cNvSpPr>
             <a:spLocks noGrp="1"/>
           </p:cNvSpPr>
@@ -404,44 +428,44 @@
           <a:p>
             <a:pPr lvl="0"/>
             <a:r>
-              <a:rPr lang="zh-TW" altLang="en-US" smtClean="0"/>
-              <a:t>按一下以編輯母片文字樣式</a:t>
+              <a:rPr lang="en-US" altLang="zh-TW"/>
+              <a:t>Click to edit Master text styles</a:t>
             </a:r>
           </a:p>
           <a:p>
             <a:pPr lvl="1"/>
             <a:r>
-              <a:rPr lang="zh-TW" altLang="en-US" smtClean="0"/>
-              <a:t>第二層</a:t>
+              <a:rPr lang="en-US" altLang="zh-TW"/>
+              <a:t>Second level</a:t>
             </a:r>
           </a:p>
           <a:p>
             <a:pPr lvl="2"/>
             <a:r>
-              <a:rPr lang="zh-TW" altLang="en-US" smtClean="0"/>
-              <a:t>第三層</a:t>
+              <a:rPr lang="en-US" altLang="zh-TW"/>
+              <a:t>Third level</a:t>
             </a:r>
           </a:p>
           <a:p>
             <a:pPr lvl="3"/>
             <a:r>
-              <a:rPr lang="zh-TW" altLang="en-US" smtClean="0"/>
-              <a:t>第四層</a:t>
+              <a:rPr lang="en-US" altLang="zh-TW"/>
+              <a:t>Fourth level</a:t>
             </a:r>
           </a:p>
           <a:p>
             <a:pPr lvl="4"/>
             <a:r>
-              <a:rPr lang="zh-TW" altLang="en-US" smtClean="0"/>
-              <a:t>第五層</a:t>
-            </a:r>
-            <a:endParaRPr lang="en-US"/>
-          </a:p>
-        </p:txBody>
-      </p:sp>
-      <p:sp>
-        <p:nvSpPr>
-          <p:cNvPr id="4" name="Date Placeholder 3"/>
+              <a:rPr lang="en-US" altLang="zh-TW"/>
+              <a:t>Fifth level</a:t>
+            </a:r>
+            <a:endParaRPr lang="zh-TW" altLang="en-US"/>
+          </a:p>
+        </p:txBody>
+      </p:sp>
+      <p:sp>
+        <p:nvSpPr>
+          <p:cNvPr id="4" name="日期版面配置區 3"/>
           <p:cNvSpPr>
             <a:spLocks noGrp="1"/>
           </p:cNvSpPr>
@@ -456,7 +480,7 @@
           <a:p>
             <a:fld id="{06D6E6CC-32A2-4F62-A69C-65BBAE7E02EA}" type="datetimeFigureOut">
               <a:rPr lang="zh-TW" altLang="en-US" smtClean="0"/>
-              <a:t>2014/5/3</a:t>
+              <a:t>2026/2/16</a:t>
             </a:fld>
             <a:endParaRPr lang="zh-TW" altLang="en-US"/>
           </a:p>
@@ -464,7 +488,7 @@
       </p:sp>
       <p:sp>
         <p:nvSpPr>
-          <p:cNvPr id="5" name="Footer Placeholder 4"/>
+          <p:cNvPr id="5" name="頁尾版面配置區 4"/>
           <p:cNvSpPr>
             <a:spLocks noGrp="1"/>
           </p:cNvSpPr>
@@ -483,7 +507,7 @@
       </p:sp>
       <p:sp>
         <p:nvSpPr>
-          <p:cNvPr id="6" name="Slide Number Placeholder 5"/>
+          <p:cNvPr id="6" name="投影片編號版面配置區 5"/>
           <p:cNvSpPr>
             <a:spLocks noGrp="1"/>
           </p:cNvSpPr>
@@ -505,6 +529,11 @@
         </p:txBody>
       </p:sp>
     </p:spTree>
+    <p:extLst>
+      <p:ext uri="{BB962C8B-B14F-4D97-AF65-F5344CB8AC3E}">
+        <p14:creationId xmlns:p14="http://schemas.microsoft.com/office/powerpoint/2010/main" val="900639321"/>
+      </p:ext>
+    </p:extLst>
   </p:cSld>
   <p:clrMapOvr>
     <a:masterClrMapping/>
@@ -531,7 +560,7 @@
       </p:grpSpPr>
       <p:sp>
         <p:nvSpPr>
-          <p:cNvPr id="2" name="Vertical Title 1"/>
+          <p:cNvPr id="2" name="直排標題 1"/>
           <p:cNvSpPr>
             <a:spLocks noGrp="1"/>
           </p:cNvSpPr>
@@ -541,8 +570,8 @@
         </p:nvSpPr>
         <p:spPr>
           <a:xfrm>
-            <a:off x="6629400" y="274638"/>
-            <a:ext cx="2057400" cy="5851525"/>
+            <a:off x="8839200" y="274639"/>
+            <a:ext cx="2743200" cy="5851525"/>
           </a:xfrm>
         </p:spPr>
         <p:txBody>
@@ -550,16 +579,16 @@
           <a:lstStyle/>
           <a:p>
             <a:r>
-              <a:rPr lang="zh-TW" altLang="en-US" smtClean="0"/>
-              <a:t>按一下以編輯母片標題樣式</a:t>
-            </a:r>
-            <a:endParaRPr lang="en-US"/>
-          </a:p>
-        </p:txBody>
-      </p:sp>
-      <p:sp>
-        <p:nvSpPr>
-          <p:cNvPr id="3" name="Vertical Text Placeholder 2"/>
+              <a:rPr lang="en-US" altLang="zh-TW"/>
+              <a:t>Click to edit Master title style</a:t>
+            </a:r>
+            <a:endParaRPr lang="zh-TW" altLang="en-US"/>
+          </a:p>
+        </p:txBody>
+      </p:sp>
+      <p:sp>
+        <p:nvSpPr>
+          <p:cNvPr id="3" name="直排文字版面配置區 2"/>
           <p:cNvSpPr>
             <a:spLocks noGrp="1"/>
           </p:cNvSpPr>
@@ -569,8 +598,8 @@
         </p:nvSpPr>
         <p:spPr>
           <a:xfrm>
-            <a:off x="457200" y="274638"/>
-            <a:ext cx="6019800" cy="5851525"/>
+            <a:off x="609600" y="274639"/>
+            <a:ext cx="8026400" cy="5851525"/>
           </a:xfrm>
         </p:spPr>
         <p:txBody>
@@ -579,44 +608,44 @@
           <a:p>
             <a:pPr lvl="0"/>
             <a:r>
-              <a:rPr lang="zh-TW" altLang="en-US" smtClean="0"/>
-              <a:t>按一下以編輯母片文字樣式</a:t>
+              <a:rPr lang="en-US" altLang="zh-TW"/>
+              <a:t>Click to edit Master text styles</a:t>
             </a:r>
           </a:p>
           <a:p>
             <a:pPr lvl="1"/>
             <a:r>
-              <a:rPr lang="zh-TW" altLang="en-US" smtClean="0"/>
-              <a:t>第二層</a:t>
+              <a:rPr lang="en-US" altLang="zh-TW"/>
+              <a:t>Second level</a:t>
             </a:r>
           </a:p>
           <a:p>
             <a:pPr lvl="2"/>
             <a:r>
-              <a:rPr lang="zh-TW" altLang="en-US" smtClean="0"/>
-              <a:t>第三層</a:t>
+              <a:rPr lang="en-US" altLang="zh-TW"/>
+              <a:t>Third level</a:t>
             </a:r>
           </a:p>
           <a:p>
             <a:pPr lvl="3"/>
             <a:r>
-              <a:rPr lang="zh-TW" altLang="en-US" smtClean="0"/>
-              <a:t>第四層</a:t>
+              <a:rPr lang="en-US" altLang="zh-TW"/>
+              <a:t>Fourth level</a:t>
             </a:r>
           </a:p>
           <a:p>
             <a:pPr lvl="4"/>
             <a:r>
-              <a:rPr lang="zh-TW" altLang="en-US" smtClean="0"/>
-              <a:t>第五層</a:t>
-            </a:r>
-            <a:endParaRPr lang="en-US"/>
-          </a:p>
-        </p:txBody>
-      </p:sp>
-      <p:sp>
-        <p:nvSpPr>
-          <p:cNvPr id="4" name="Date Placeholder 3"/>
+              <a:rPr lang="en-US" altLang="zh-TW"/>
+              <a:t>Fifth level</a:t>
+            </a:r>
+            <a:endParaRPr lang="zh-TW" altLang="en-US"/>
+          </a:p>
+        </p:txBody>
+      </p:sp>
+      <p:sp>
+        <p:nvSpPr>
+          <p:cNvPr id="4" name="日期版面配置區 3"/>
           <p:cNvSpPr>
             <a:spLocks noGrp="1"/>
           </p:cNvSpPr>
@@ -631,7 +660,7 @@
           <a:p>
             <a:fld id="{06D6E6CC-32A2-4F62-A69C-65BBAE7E02EA}" type="datetimeFigureOut">
               <a:rPr lang="zh-TW" altLang="en-US" smtClean="0"/>
-              <a:t>2014/5/3</a:t>
+              <a:t>2026/2/16</a:t>
             </a:fld>
             <a:endParaRPr lang="zh-TW" altLang="en-US"/>
           </a:p>
@@ -639,7 +668,7 @@
       </p:sp>
       <p:sp>
         <p:nvSpPr>
-          <p:cNvPr id="5" name="Footer Placeholder 4"/>
+          <p:cNvPr id="5" name="頁尾版面配置區 4"/>
           <p:cNvSpPr>
             <a:spLocks noGrp="1"/>
           </p:cNvSpPr>
@@ -658,7 +687,7 @@
       </p:sp>
       <p:sp>
         <p:nvSpPr>
-          <p:cNvPr id="6" name="Slide Number Placeholder 5"/>
+          <p:cNvPr id="6" name="投影片編號版面配置區 5"/>
           <p:cNvSpPr>
             <a:spLocks noGrp="1"/>
           </p:cNvSpPr>
@@ -680,6 +709,11 @@
         </p:txBody>
       </p:sp>
     </p:spTree>
+    <p:extLst>
+      <p:ext uri="{BB962C8B-B14F-4D97-AF65-F5344CB8AC3E}">
+        <p14:creationId xmlns:p14="http://schemas.microsoft.com/office/powerpoint/2010/main" val="364915021"/>
+      </p:ext>
+    </p:extLst>
   </p:cSld>
   <p:clrMapOvr>
     <a:masterClrMapping/>
@@ -706,7 +740,7 @@
       </p:grpSpPr>
       <p:sp>
         <p:nvSpPr>
-          <p:cNvPr id="2" name="Title 1"/>
+          <p:cNvPr id="2" name="標題 1"/>
           <p:cNvSpPr>
             <a:spLocks noGrp="1"/>
           </p:cNvSpPr>
@@ -720,16 +754,16 @@
           <a:lstStyle/>
           <a:p>
             <a:r>
-              <a:rPr lang="zh-TW" altLang="en-US" smtClean="0"/>
-              <a:t>按一下以編輯母片標題樣式</a:t>
-            </a:r>
-            <a:endParaRPr lang="en-US"/>
-          </a:p>
-        </p:txBody>
-      </p:sp>
-      <p:sp>
-        <p:nvSpPr>
-          <p:cNvPr id="3" name="Content Placeholder 2"/>
+              <a:rPr lang="en-US" altLang="zh-TW"/>
+              <a:t>Click to edit Master title style</a:t>
+            </a:r>
+            <a:endParaRPr lang="zh-TW" altLang="en-US"/>
+          </a:p>
+        </p:txBody>
+      </p:sp>
+      <p:sp>
+        <p:nvSpPr>
+          <p:cNvPr id="3" name="內容版面配置區 2"/>
           <p:cNvSpPr>
             <a:spLocks noGrp="1"/>
           </p:cNvSpPr>
@@ -744,44 +778,44 @@
           <a:p>
             <a:pPr lvl="0"/>
             <a:r>
-              <a:rPr lang="zh-TW" altLang="en-US" smtClean="0"/>
-              <a:t>按一下以編輯母片文字樣式</a:t>
+              <a:rPr lang="en-US" altLang="zh-TW"/>
+              <a:t>Click to edit Master text styles</a:t>
             </a:r>
           </a:p>
           <a:p>
             <a:pPr lvl="1"/>
             <a:r>
-              <a:rPr lang="zh-TW" altLang="en-US" smtClean="0"/>
-              <a:t>第二層</a:t>
+              <a:rPr lang="en-US" altLang="zh-TW"/>
+              <a:t>Second level</a:t>
             </a:r>
           </a:p>
           <a:p>
             <a:pPr lvl="2"/>
             <a:r>
-              <a:rPr lang="zh-TW" altLang="en-US" smtClean="0"/>
-              <a:t>第三層</a:t>
+              <a:rPr lang="en-US" altLang="zh-TW"/>
+              <a:t>Third level</a:t>
             </a:r>
           </a:p>
           <a:p>
             <a:pPr lvl="3"/>
             <a:r>
-              <a:rPr lang="zh-TW" altLang="en-US" smtClean="0"/>
-              <a:t>第四層</a:t>
+              <a:rPr lang="en-US" altLang="zh-TW"/>
+              <a:t>Fourth level</a:t>
             </a:r>
           </a:p>
           <a:p>
             <a:pPr lvl="4"/>
             <a:r>
-              <a:rPr lang="zh-TW" altLang="en-US" smtClean="0"/>
-              <a:t>第五層</a:t>
-            </a:r>
-            <a:endParaRPr lang="en-US"/>
-          </a:p>
-        </p:txBody>
-      </p:sp>
-      <p:sp>
-        <p:nvSpPr>
-          <p:cNvPr id="4" name="Date Placeholder 3"/>
+              <a:rPr lang="en-US" altLang="zh-TW"/>
+              <a:t>Fifth level</a:t>
+            </a:r>
+            <a:endParaRPr lang="zh-TW" altLang="en-US"/>
+          </a:p>
+        </p:txBody>
+      </p:sp>
+      <p:sp>
+        <p:nvSpPr>
+          <p:cNvPr id="4" name="日期版面配置區 3"/>
           <p:cNvSpPr>
             <a:spLocks noGrp="1"/>
           </p:cNvSpPr>
@@ -796,7 +830,7 @@
           <a:p>
             <a:fld id="{06D6E6CC-32A2-4F62-A69C-65BBAE7E02EA}" type="datetimeFigureOut">
               <a:rPr lang="zh-TW" altLang="en-US" smtClean="0"/>
-              <a:t>2014/5/3</a:t>
+              <a:t>2026/2/16</a:t>
             </a:fld>
             <a:endParaRPr lang="zh-TW" altLang="en-US"/>
           </a:p>
@@ -804,7 +838,7 @@
       </p:sp>
       <p:sp>
         <p:nvSpPr>
-          <p:cNvPr id="5" name="Footer Placeholder 4"/>
+          <p:cNvPr id="5" name="頁尾版面配置區 4"/>
           <p:cNvSpPr>
             <a:spLocks noGrp="1"/>
           </p:cNvSpPr>
@@ -823,7 +857,7 @@
       </p:sp>
       <p:sp>
         <p:nvSpPr>
-          <p:cNvPr id="6" name="Slide Number Placeholder 5"/>
+          <p:cNvPr id="6" name="投影片編號版面配置區 5"/>
           <p:cNvSpPr>
             <a:spLocks noGrp="1"/>
           </p:cNvSpPr>
@@ -845,6 +879,11 @@
         </p:txBody>
       </p:sp>
     </p:spTree>
+    <p:extLst>
+      <p:ext uri="{BB962C8B-B14F-4D97-AF65-F5344CB8AC3E}">
+        <p14:creationId xmlns:p14="http://schemas.microsoft.com/office/powerpoint/2010/main" val="1033962048"/>
+      </p:ext>
+    </p:extLst>
   </p:cSld>
   <p:clrMapOvr>
     <a:masterClrMapping/>
@@ -871,7 +910,7 @@
       </p:grpSpPr>
       <p:sp>
         <p:nvSpPr>
-          <p:cNvPr id="2" name="Title 1"/>
+          <p:cNvPr id="2" name="標題 1"/>
           <p:cNvSpPr>
             <a:spLocks noGrp="1"/>
           </p:cNvSpPr>
@@ -881,29 +920,29 @@
         </p:nvSpPr>
         <p:spPr>
           <a:xfrm>
-            <a:off x="722313" y="4406900"/>
-            <a:ext cx="7772400" cy="1362075"/>
+            <a:off x="963084" y="4406901"/>
+            <a:ext cx="10363200" cy="1362075"/>
           </a:xfrm>
         </p:spPr>
         <p:txBody>
           <a:bodyPr anchor="t"/>
           <a:lstStyle>
             <a:lvl1pPr algn="l">
-              <a:defRPr sz="4000" b="1" cap="all"/>
+              <a:defRPr sz="5333" b="1" cap="all"/>
             </a:lvl1pPr>
           </a:lstStyle>
           <a:p>
             <a:r>
-              <a:rPr lang="zh-TW" altLang="en-US" smtClean="0"/>
-              <a:t>按一下以編輯母片標題樣式</a:t>
-            </a:r>
-            <a:endParaRPr lang="en-US"/>
-          </a:p>
-        </p:txBody>
-      </p:sp>
-      <p:sp>
-        <p:nvSpPr>
-          <p:cNvPr id="3" name="Text Placeholder 2"/>
+              <a:rPr lang="en-US" altLang="zh-TW"/>
+              <a:t>Click to edit Master title style</a:t>
+            </a:r>
+            <a:endParaRPr lang="zh-TW" altLang="en-US"/>
+          </a:p>
+        </p:txBody>
+      </p:sp>
+      <p:sp>
+        <p:nvSpPr>
+          <p:cNvPr id="3" name="文字版面配置區 2"/>
           <p:cNvSpPr>
             <a:spLocks noGrp="1"/>
           </p:cNvSpPr>
@@ -913,8 +952,8 @@
         </p:nvSpPr>
         <p:spPr>
           <a:xfrm>
-            <a:off x="722313" y="2906713"/>
-            <a:ext cx="7772400" cy="1500187"/>
+            <a:off x="963084" y="2906713"/>
+            <a:ext cx="10363200" cy="1500187"/>
           </a:xfrm>
         </p:spPr>
         <p:txBody>
@@ -922,7 +961,7 @@
           <a:lstStyle>
             <a:lvl1pPr marL="0" indent="0">
               <a:buNone/>
-              <a:defRPr sz="2000">
+              <a:defRPr sz="2667">
                 <a:solidFill>
                   <a:schemeClr val="tx1">
                     <a:tint val="75000"/>
@@ -930,9 +969,9 @@
                 </a:solidFill>
               </a:defRPr>
             </a:lvl1pPr>
-            <a:lvl2pPr marL="457200" indent="0">
-              <a:buNone/>
-              <a:defRPr sz="1800">
+            <a:lvl2pPr marL="609585" indent="0">
+              <a:buNone/>
+              <a:defRPr sz="2400">
                 <a:solidFill>
                   <a:schemeClr val="tx1">
                     <a:tint val="75000"/>
@@ -940,9 +979,9 @@
                 </a:solidFill>
               </a:defRPr>
             </a:lvl2pPr>
-            <a:lvl3pPr marL="914400" indent="0">
-              <a:buNone/>
-              <a:defRPr sz="1600">
+            <a:lvl3pPr marL="1219170" indent="0">
+              <a:buNone/>
+              <a:defRPr sz="2133">
                 <a:solidFill>
                   <a:schemeClr val="tx1">
                     <a:tint val="75000"/>
@@ -950,9 +989,9 @@
                 </a:solidFill>
               </a:defRPr>
             </a:lvl3pPr>
-            <a:lvl4pPr marL="1371600" indent="0">
-              <a:buNone/>
-              <a:defRPr sz="1400">
+            <a:lvl4pPr marL="1828754" indent="0">
+              <a:buNone/>
+              <a:defRPr sz="1867">
                 <a:solidFill>
                   <a:schemeClr val="tx1">
                     <a:tint val="75000"/>
@@ -960,9 +999,9 @@
                 </a:solidFill>
               </a:defRPr>
             </a:lvl4pPr>
-            <a:lvl5pPr marL="1828800" indent="0">
-              <a:buNone/>
-              <a:defRPr sz="1400">
+            <a:lvl5pPr marL="2438339" indent="0">
+              <a:buNone/>
+              <a:defRPr sz="1867">
                 <a:solidFill>
                   <a:schemeClr val="tx1">
                     <a:tint val="75000"/>
@@ -970,9 +1009,9 @@
                 </a:solidFill>
               </a:defRPr>
             </a:lvl5pPr>
-            <a:lvl6pPr marL="2286000" indent="0">
-              <a:buNone/>
-              <a:defRPr sz="1400">
+            <a:lvl6pPr marL="3047924" indent="0">
+              <a:buNone/>
+              <a:defRPr sz="1867">
                 <a:solidFill>
                   <a:schemeClr val="tx1">
                     <a:tint val="75000"/>
@@ -980,9 +1019,9 @@
                 </a:solidFill>
               </a:defRPr>
             </a:lvl6pPr>
-            <a:lvl7pPr marL="2743200" indent="0">
-              <a:buNone/>
-              <a:defRPr sz="1400">
+            <a:lvl7pPr marL="3657509" indent="0">
+              <a:buNone/>
+              <a:defRPr sz="1867">
                 <a:solidFill>
                   <a:schemeClr val="tx1">
                     <a:tint val="75000"/>
@@ -990,9 +1029,9 @@
                 </a:solidFill>
               </a:defRPr>
             </a:lvl7pPr>
-            <a:lvl8pPr marL="3200400" indent="0">
-              <a:buNone/>
-              <a:defRPr sz="1400">
+            <a:lvl8pPr marL="4267093" indent="0">
+              <a:buNone/>
+              <a:defRPr sz="1867">
                 <a:solidFill>
                   <a:schemeClr val="tx1">
                     <a:tint val="75000"/>
@@ -1000,9 +1039,9 @@
                 </a:solidFill>
               </a:defRPr>
             </a:lvl8pPr>
-            <a:lvl9pPr marL="3657600" indent="0">
-              <a:buNone/>
-              <a:defRPr sz="1400">
+            <a:lvl9pPr marL="4876678" indent="0">
+              <a:buNone/>
+              <a:defRPr sz="1867">
                 <a:solidFill>
                   <a:schemeClr val="tx1">
                     <a:tint val="75000"/>
@@ -1014,15 +1053,15 @@
           <a:p>
             <a:pPr lvl="0"/>
             <a:r>
-              <a:rPr lang="zh-TW" altLang="en-US" smtClean="0"/>
-              <a:t>按一下以編輯母片文字樣式</a:t>
-            </a:r>
-          </a:p>
-        </p:txBody>
-      </p:sp>
-      <p:sp>
-        <p:nvSpPr>
-          <p:cNvPr id="4" name="Date Placeholder 3"/>
+              <a:rPr lang="en-US" altLang="zh-TW"/>
+              <a:t>Click to edit Master text styles</a:t>
+            </a:r>
+          </a:p>
+        </p:txBody>
+      </p:sp>
+      <p:sp>
+        <p:nvSpPr>
+          <p:cNvPr id="4" name="日期版面配置區 3"/>
           <p:cNvSpPr>
             <a:spLocks noGrp="1"/>
           </p:cNvSpPr>
@@ -1037,7 +1076,7 @@
           <a:p>
             <a:fld id="{06D6E6CC-32A2-4F62-A69C-65BBAE7E02EA}" type="datetimeFigureOut">
               <a:rPr lang="zh-TW" altLang="en-US" smtClean="0"/>
-              <a:t>2014/5/3</a:t>
+              <a:t>2026/2/16</a:t>
             </a:fld>
             <a:endParaRPr lang="zh-TW" altLang="en-US"/>
           </a:p>
@@ -1045,7 +1084,7 @@
       </p:sp>
       <p:sp>
         <p:nvSpPr>
-          <p:cNvPr id="5" name="Footer Placeholder 4"/>
+          <p:cNvPr id="5" name="頁尾版面配置區 4"/>
           <p:cNvSpPr>
             <a:spLocks noGrp="1"/>
           </p:cNvSpPr>
@@ -1064,7 +1103,7 @@
       </p:sp>
       <p:sp>
         <p:nvSpPr>
-          <p:cNvPr id="6" name="Slide Number Placeholder 5"/>
+          <p:cNvPr id="6" name="投影片編號版面配置區 5"/>
           <p:cNvSpPr>
             <a:spLocks noGrp="1"/>
           </p:cNvSpPr>
@@ -1086,6 +1125,11 @@
         </p:txBody>
       </p:sp>
     </p:spTree>
+    <p:extLst>
+      <p:ext uri="{BB962C8B-B14F-4D97-AF65-F5344CB8AC3E}">
+        <p14:creationId xmlns:p14="http://schemas.microsoft.com/office/powerpoint/2010/main" val="1017997863"/>
+      </p:ext>
+    </p:extLst>
   </p:cSld>
   <p:clrMapOvr>
     <a:masterClrMapping/>
@@ -1112,7 +1156,7 @@
       </p:grpSpPr>
       <p:sp>
         <p:nvSpPr>
-          <p:cNvPr id="2" name="Title 1"/>
+          <p:cNvPr id="2" name="標題 1"/>
           <p:cNvSpPr>
             <a:spLocks noGrp="1"/>
           </p:cNvSpPr>
@@ -1126,16 +1170,16 @@
           <a:lstStyle/>
           <a:p>
             <a:r>
-              <a:rPr lang="zh-TW" altLang="en-US" smtClean="0"/>
-              <a:t>按一下以編輯母片標題樣式</a:t>
-            </a:r>
-            <a:endParaRPr lang="en-US"/>
-          </a:p>
-        </p:txBody>
-      </p:sp>
-      <p:sp>
-        <p:nvSpPr>
-          <p:cNvPr id="3" name="Content Placeholder 2"/>
+              <a:rPr lang="en-US" altLang="zh-TW"/>
+              <a:t>Click to edit Master title style</a:t>
+            </a:r>
+            <a:endParaRPr lang="zh-TW" altLang="en-US"/>
+          </a:p>
+        </p:txBody>
+      </p:sp>
+      <p:sp>
+        <p:nvSpPr>
+          <p:cNvPr id="3" name="內容版面配置區 2"/>
           <p:cNvSpPr>
             <a:spLocks noGrp="1"/>
           </p:cNvSpPr>
@@ -1145,82 +1189,82 @@
         </p:nvSpPr>
         <p:spPr>
           <a:xfrm>
-            <a:off x="457200" y="1600200"/>
-            <a:ext cx="4038600" cy="4525963"/>
+            <a:off x="609600" y="1600201"/>
+            <a:ext cx="5384800" cy="4525963"/>
           </a:xfrm>
         </p:spPr>
         <p:txBody>
           <a:bodyPr/>
           <a:lstStyle>
             <a:lvl1pPr>
-              <a:defRPr sz="2800"/>
+              <a:defRPr sz="3733"/>
             </a:lvl1pPr>
             <a:lvl2pPr>
-              <a:defRPr sz="2400"/>
+              <a:defRPr sz="3200"/>
             </a:lvl2pPr>
             <a:lvl3pPr>
-              <a:defRPr sz="2000"/>
+              <a:defRPr sz="2667"/>
             </a:lvl3pPr>
             <a:lvl4pPr>
-              <a:defRPr sz="1800"/>
+              <a:defRPr sz="2400"/>
             </a:lvl4pPr>
             <a:lvl5pPr>
-              <a:defRPr sz="1800"/>
+              <a:defRPr sz="2400"/>
             </a:lvl5pPr>
             <a:lvl6pPr>
-              <a:defRPr sz="1800"/>
+              <a:defRPr sz="2400"/>
             </a:lvl6pPr>
             <a:lvl7pPr>
-              <a:defRPr sz="1800"/>
+              <a:defRPr sz="2400"/>
             </a:lvl7pPr>
             <a:lvl8pPr>
-              <a:defRPr sz="1800"/>
+              <a:defRPr sz="2400"/>
             </a:lvl8pPr>
             <a:lvl9pPr>
-              <a:defRPr sz="1800"/>
+              <a:defRPr sz="2400"/>
             </a:lvl9pPr>
           </a:lstStyle>
           <a:p>
             <a:pPr lvl="0"/>
             <a:r>
-              <a:rPr lang="zh-TW" altLang="en-US" smtClean="0"/>
-              <a:t>按一下以編輯母片文字樣式</a:t>
+              <a:rPr lang="en-US" altLang="zh-TW"/>
+              <a:t>Click to edit Master text styles</a:t>
             </a:r>
           </a:p>
           <a:p>
             <a:pPr lvl="1"/>
             <a:r>
-              <a:rPr lang="zh-TW" altLang="en-US" smtClean="0"/>
-              <a:t>第二層</a:t>
+              <a:rPr lang="en-US" altLang="zh-TW"/>
+              <a:t>Second level</a:t>
             </a:r>
           </a:p>
           <a:p>
             <a:pPr lvl="2"/>
             <a:r>
-              <a:rPr lang="zh-TW" altLang="en-US" smtClean="0"/>
-              <a:t>第三層</a:t>
+              <a:rPr lang="en-US" altLang="zh-TW"/>
+              <a:t>Third level</a:t>
             </a:r>
           </a:p>
           <a:p>
             <a:pPr lvl="3"/>
             <a:r>
-              <a:rPr lang="zh-TW" altLang="en-US" smtClean="0"/>
-              <a:t>第四層</a:t>
+              <a:rPr lang="en-US" altLang="zh-TW"/>
+              <a:t>Fourth level</a:t>
             </a:r>
           </a:p>
           <a:p>
             <a:pPr lvl="4"/>
             <a:r>
-              <a:rPr lang="zh-TW" altLang="en-US" smtClean="0"/>
-              <a:t>第五層</a:t>
-            </a:r>
-            <a:endParaRPr lang="en-US"/>
-          </a:p>
-        </p:txBody>
-      </p:sp>
-      <p:sp>
-        <p:nvSpPr>
-          <p:cNvPr id="4" name="Content Placeholder 3"/>
+              <a:rPr lang="en-US" altLang="zh-TW"/>
+              <a:t>Fifth level</a:t>
+            </a:r>
+            <a:endParaRPr lang="zh-TW" altLang="en-US"/>
+          </a:p>
+        </p:txBody>
+      </p:sp>
+      <p:sp>
+        <p:nvSpPr>
+          <p:cNvPr id="4" name="內容版面配置區 3"/>
           <p:cNvSpPr>
             <a:spLocks noGrp="1"/>
           </p:cNvSpPr>
@@ -1230,82 +1274,82 @@
         </p:nvSpPr>
         <p:spPr>
           <a:xfrm>
-            <a:off x="4648200" y="1600200"/>
-            <a:ext cx="4038600" cy="4525963"/>
+            <a:off x="6197600" y="1600201"/>
+            <a:ext cx="5384800" cy="4525963"/>
           </a:xfrm>
         </p:spPr>
         <p:txBody>
           <a:bodyPr/>
           <a:lstStyle>
             <a:lvl1pPr>
-              <a:defRPr sz="2800"/>
+              <a:defRPr sz="3733"/>
             </a:lvl1pPr>
             <a:lvl2pPr>
-              <a:defRPr sz="2400"/>
+              <a:defRPr sz="3200"/>
             </a:lvl2pPr>
             <a:lvl3pPr>
-              <a:defRPr sz="2000"/>
+              <a:defRPr sz="2667"/>
             </a:lvl3pPr>
             <a:lvl4pPr>
-              <a:defRPr sz="1800"/>
+              <a:defRPr sz="2400"/>
             </a:lvl4pPr>
             <a:lvl5pPr>
-              <a:defRPr sz="1800"/>
+              <a:defRPr sz="2400"/>
             </a:lvl5pPr>
             <a:lvl6pPr>
-              <a:defRPr sz="1800"/>
+              <a:defRPr sz="2400"/>
             </a:lvl6pPr>
             <a:lvl7pPr>
-              <a:defRPr sz="1800"/>
+              <a:defRPr sz="2400"/>
             </a:lvl7pPr>
             <a:lvl8pPr>
-              <a:defRPr sz="1800"/>
+              <a:defRPr sz="2400"/>
             </a:lvl8pPr>
             <a:lvl9pPr>
-              <a:defRPr sz="1800"/>
+              <a:defRPr sz="2400"/>
             </a:lvl9pPr>
           </a:lstStyle>
           <a:p>
             <a:pPr lvl="0"/>
             <a:r>
-              <a:rPr lang="zh-TW" altLang="en-US" smtClean="0"/>
-              <a:t>按一下以編輯母片文字樣式</a:t>
+              <a:rPr lang="en-US" altLang="zh-TW"/>
+              <a:t>Click to edit Master text styles</a:t>
             </a:r>
           </a:p>
           <a:p>
             <a:pPr lvl="1"/>
             <a:r>
-              <a:rPr lang="zh-TW" altLang="en-US" smtClean="0"/>
-              <a:t>第二層</a:t>
+              <a:rPr lang="en-US" altLang="zh-TW"/>
+              <a:t>Second level</a:t>
             </a:r>
           </a:p>
           <a:p>
             <a:pPr lvl="2"/>
             <a:r>
-              <a:rPr lang="zh-TW" altLang="en-US" smtClean="0"/>
-              <a:t>第三層</a:t>
+              <a:rPr lang="en-US" altLang="zh-TW"/>
+              <a:t>Third level</a:t>
             </a:r>
           </a:p>
           <a:p>
             <a:pPr lvl="3"/>
             <a:r>
-              <a:rPr lang="zh-TW" altLang="en-US" smtClean="0"/>
-              <a:t>第四層</a:t>
+              <a:rPr lang="en-US" altLang="zh-TW"/>
+              <a:t>Fourth level</a:t>
             </a:r>
           </a:p>
           <a:p>
             <a:pPr lvl="4"/>
             <a:r>
-              <a:rPr lang="zh-TW" altLang="en-US" smtClean="0"/>
-              <a:t>第五層</a:t>
-            </a:r>
-            <a:endParaRPr lang="en-US"/>
-          </a:p>
-        </p:txBody>
-      </p:sp>
-      <p:sp>
-        <p:nvSpPr>
-          <p:cNvPr id="5" name="Date Placeholder 4"/>
+              <a:rPr lang="en-US" altLang="zh-TW"/>
+              <a:t>Fifth level</a:t>
+            </a:r>
+            <a:endParaRPr lang="zh-TW" altLang="en-US"/>
+          </a:p>
+        </p:txBody>
+      </p:sp>
+      <p:sp>
+        <p:nvSpPr>
+          <p:cNvPr id="5" name="日期版面配置區 4"/>
           <p:cNvSpPr>
             <a:spLocks noGrp="1"/>
           </p:cNvSpPr>
@@ -1320,7 +1364,7 @@
           <a:p>
             <a:fld id="{06D6E6CC-32A2-4F62-A69C-65BBAE7E02EA}" type="datetimeFigureOut">
               <a:rPr lang="zh-TW" altLang="en-US" smtClean="0"/>
-              <a:t>2014/5/3</a:t>
+              <a:t>2026/2/16</a:t>
             </a:fld>
             <a:endParaRPr lang="zh-TW" altLang="en-US"/>
           </a:p>
@@ -1328,7 +1372,7 @@
       </p:sp>
       <p:sp>
         <p:nvSpPr>
-          <p:cNvPr id="6" name="Footer Placeholder 5"/>
+          <p:cNvPr id="6" name="頁尾版面配置區 5"/>
           <p:cNvSpPr>
             <a:spLocks noGrp="1"/>
           </p:cNvSpPr>
@@ -1347,7 +1391,7 @@
       </p:sp>
       <p:sp>
         <p:nvSpPr>
-          <p:cNvPr id="7" name="Slide Number Placeholder 6"/>
+          <p:cNvPr id="7" name="投影片編號版面配置區 6"/>
           <p:cNvSpPr>
             <a:spLocks noGrp="1"/>
           </p:cNvSpPr>
@@ -1369,6 +1413,11 @@
         </p:txBody>
       </p:sp>
     </p:spTree>
+    <p:extLst>
+      <p:ext uri="{BB962C8B-B14F-4D97-AF65-F5344CB8AC3E}">
+        <p14:creationId xmlns:p14="http://schemas.microsoft.com/office/powerpoint/2010/main" val="3310847547"/>
+      </p:ext>
+    </p:extLst>
   </p:cSld>
   <p:clrMapOvr>
     <a:masterClrMapping/>
@@ -1395,7 +1444,7 @@
       </p:grpSpPr>
       <p:sp>
         <p:nvSpPr>
-          <p:cNvPr id="2" name="Title 1"/>
+          <p:cNvPr id="2" name="標題 1"/>
           <p:cNvSpPr>
             <a:spLocks noGrp="1"/>
           </p:cNvSpPr>
@@ -1413,16 +1462,16 @@
           </a:lstStyle>
           <a:p>
             <a:r>
-              <a:rPr lang="zh-TW" altLang="en-US" smtClean="0"/>
-              <a:t>按一下以編輯母片標題樣式</a:t>
-            </a:r>
-            <a:endParaRPr lang="en-US"/>
-          </a:p>
-        </p:txBody>
-      </p:sp>
-      <p:sp>
-        <p:nvSpPr>
-          <p:cNvPr id="3" name="Text Placeholder 2"/>
+              <a:rPr lang="en-US" altLang="zh-TW"/>
+              <a:t>Click to edit Master title style</a:t>
+            </a:r>
+            <a:endParaRPr lang="zh-TW" altLang="en-US"/>
+          </a:p>
+        </p:txBody>
+      </p:sp>
+      <p:sp>
+        <p:nvSpPr>
+          <p:cNvPr id="3" name="文字版面配置區 2"/>
           <p:cNvSpPr>
             <a:spLocks noGrp="1"/>
           </p:cNvSpPr>
@@ -1432,8 +1481,8 @@
         </p:nvSpPr>
         <p:spPr>
           <a:xfrm>
-            <a:off x="457200" y="1535113"/>
-            <a:ext cx="4040188" cy="639762"/>
+            <a:off x="609600" y="1535113"/>
+            <a:ext cx="5386917" cy="639763"/>
           </a:xfrm>
         </p:spPr>
         <p:txBody>
@@ -1441,53 +1490,53 @@
           <a:lstStyle>
             <a:lvl1pPr marL="0" indent="0">
               <a:buNone/>
+              <a:defRPr sz="3200" b="1"/>
+            </a:lvl1pPr>
+            <a:lvl2pPr marL="609585" indent="0">
+              <a:buNone/>
+              <a:defRPr sz="2667" b="1"/>
+            </a:lvl2pPr>
+            <a:lvl3pPr marL="1219170" indent="0">
+              <a:buNone/>
               <a:defRPr sz="2400" b="1"/>
-            </a:lvl1pPr>
-            <a:lvl2pPr marL="457200" indent="0">
-              <a:buNone/>
-              <a:defRPr sz="2000" b="1"/>
-            </a:lvl2pPr>
-            <a:lvl3pPr marL="914400" indent="0">
-              <a:buNone/>
-              <a:defRPr sz="1800" b="1"/>
             </a:lvl3pPr>
-            <a:lvl4pPr marL="1371600" indent="0">
-              <a:buNone/>
-              <a:defRPr sz="1600" b="1"/>
+            <a:lvl4pPr marL="1828754" indent="0">
+              <a:buNone/>
+              <a:defRPr sz="2133" b="1"/>
             </a:lvl4pPr>
-            <a:lvl5pPr marL="1828800" indent="0">
-              <a:buNone/>
-              <a:defRPr sz="1600" b="1"/>
+            <a:lvl5pPr marL="2438339" indent="0">
+              <a:buNone/>
+              <a:defRPr sz="2133" b="1"/>
             </a:lvl5pPr>
-            <a:lvl6pPr marL="2286000" indent="0">
-              <a:buNone/>
-              <a:defRPr sz="1600" b="1"/>
+            <a:lvl6pPr marL="3047924" indent="0">
+              <a:buNone/>
+              <a:defRPr sz="2133" b="1"/>
             </a:lvl6pPr>
-            <a:lvl7pPr marL="2743200" indent="0">
-              <a:buNone/>
-              <a:defRPr sz="1600" b="1"/>
+            <a:lvl7pPr marL="3657509" indent="0">
+              <a:buNone/>
+              <a:defRPr sz="2133" b="1"/>
             </a:lvl7pPr>
-            <a:lvl8pPr marL="3200400" indent="0">
-              <a:buNone/>
-              <a:defRPr sz="1600" b="1"/>
+            <a:lvl8pPr marL="4267093" indent="0">
+              <a:buNone/>
+              <a:defRPr sz="2133" b="1"/>
             </a:lvl8pPr>
-            <a:lvl9pPr marL="3657600" indent="0">
-              <a:buNone/>
-              <a:defRPr sz="1600" b="1"/>
+            <a:lvl9pPr marL="4876678" indent="0">
+              <a:buNone/>
+              <a:defRPr sz="2133" b="1"/>
             </a:lvl9pPr>
           </a:lstStyle>
           <a:p>
             <a:pPr lvl="0"/>
             <a:r>
-              <a:rPr lang="zh-TW" altLang="en-US" smtClean="0"/>
-              <a:t>按一下以編輯母片文字樣式</a:t>
-            </a:r>
-          </a:p>
-        </p:txBody>
-      </p:sp>
-      <p:sp>
-        <p:nvSpPr>
-          <p:cNvPr id="4" name="Content Placeholder 3"/>
+              <a:rPr lang="en-US" altLang="zh-TW"/>
+              <a:t>Click to edit Master text styles</a:t>
+            </a:r>
+          </a:p>
+        </p:txBody>
+      </p:sp>
+      <p:sp>
+        <p:nvSpPr>
+          <p:cNvPr id="4" name="內容版面配置區 3"/>
           <p:cNvSpPr>
             <a:spLocks noGrp="1"/>
           </p:cNvSpPr>
@@ -1497,82 +1546,82 @@
         </p:nvSpPr>
         <p:spPr>
           <a:xfrm>
-            <a:off x="457200" y="2174875"/>
-            <a:ext cx="4040188" cy="3951288"/>
+            <a:off x="609600" y="2174875"/>
+            <a:ext cx="5386917" cy="3951288"/>
           </a:xfrm>
         </p:spPr>
         <p:txBody>
           <a:bodyPr/>
           <a:lstStyle>
             <a:lvl1pPr>
-              <a:defRPr sz="2400"/>
+              <a:defRPr sz="3200"/>
             </a:lvl1pPr>
             <a:lvl2pPr>
-              <a:defRPr sz="2000"/>
+              <a:defRPr sz="2667"/>
             </a:lvl2pPr>
             <a:lvl3pPr>
-              <a:defRPr sz="1800"/>
+              <a:defRPr sz="2400"/>
             </a:lvl3pPr>
             <a:lvl4pPr>
-              <a:defRPr sz="1600"/>
+              <a:defRPr sz="2133"/>
             </a:lvl4pPr>
             <a:lvl5pPr>
-              <a:defRPr sz="1600"/>
+              <a:defRPr sz="2133"/>
             </a:lvl5pPr>
             <a:lvl6pPr>
-              <a:defRPr sz="1600"/>
+              <a:defRPr sz="2133"/>
             </a:lvl6pPr>
             <a:lvl7pPr>
-              <a:defRPr sz="1600"/>
+              <a:defRPr sz="2133"/>
             </a:lvl7pPr>
             <a:lvl8pPr>
-              <a:defRPr sz="1600"/>
+              <a:defRPr sz="2133"/>
             </a:lvl8pPr>
             <a:lvl9pPr>
-              <a:defRPr sz="1600"/>
+              <a:defRPr sz="2133"/>
             </a:lvl9pPr>
           </a:lstStyle>
           <a:p>
             <a:pPr lvl="0"/>
             <a:r>
-              <a:rPr lang="zh-TW" altLang="en-US" smtClean="0"/>
-              <a:t>按一下以編輯母片文字樣式</a:t>
+              <a:rPr lang="en-US" altLang="zh-TW"/>
+              <a:t>Click to edit Master text styles</a:t>
             </a:r>
           </a:p>
           <a:p>
             <a:pPr lvl="1"/>
             <a:r>
-              <a:rPr lang="zh-TW" altLang="en-US" smtClean="0"/>
-              <a:t>第二層</a:t>
+              <a:rPr lang="en-US" altLang="zh-TW"/>
+              <a:t>Second level</a:t>
             </a:r>
           </a:p>
           <a:p>
             <a:pPr lvl="2"/>
             <a:r>
-              <a:rPr lang="zh-TW" altLang="en-US" smtClean="0"/>
-              <a:t>第三層</a:t>
+              <a:rPr lang="en-US" altLang="zh-TW"/>
+              <a:t>Third level</a:t>
             </a:r>
           </a:p>
           <a:p>
             <a:pPr lvl="3"/>
             <a:r>
-              <a:rPr lang="zh-TW" altLang="en-US" smtClean="0"/>
-              <a:t>第四層</a:t>
+              <a:rPr lang="en-US" altLang="zh-TW"/>
+              <a:t>Fourth level</a:t>
             </a:r>
           </a:p>
           <a:p>
             <a:pPr lvl="4"/>
             <a:r>
-              <a:rPr lang="zh-TW" altLang="en-US" smtClean="0"/>
-              <a:t>第五層</a:t>
-            </a:r>
-            <a:endParaRPr lang="en-US"/>
-          </a:p>
-        </p:txBody>
-      </p:sp>
-      <p:sp>
-        <p:nvSpPr>
-          <p:cNvPr id="5" name="Text Placeholder 4"/>
+              <a:rPr lang="en-US" altLang="zh-TW"/>
+              <a:t>Fifth level</a:t>
+            </a:r>
+            <a:endParaRPr lang="zh-TW" altLang="en-US"/>
+          </a:p>
+        </p:txBody>
+      </p:sp>
+      <p:sp>
+        <p:nvSpPr>
+          <p:cNvPr id="5" name="文字版面配置區 4"/>
           <p:cNvSpPr>
             <a:spLocks noGrp="1"/>
           </p:cNvSpPr>
@@ -1582,8 +1631,8 @@
         </p:nvSpPr>
         <p:spPr>
           <a:xfrm>
-            <a:off x="4645025" y="1535113"/>
-            <a:ext cx="4041775" cy="639762"/>
+            <a:off x="6193372" y="1535113"/>
+            <a:ext cx="5389033" cy="639763"/>
           </a:xfrm>
         </p:spPr>
         <p:txBody>
@@ -1591,53 +1640,53 @@
           <a:lstStyle>
             <a:lvl1pPr marL="0" indent="0">
               <a:buNone/>
+              <a:defRPr sz="3200" b="1"/>
+            </a:lvl1pPr>
+            <a:lvl2pPr marL="609585" indent="0">
+              <a:buNone/>
+              <a:defRPr sz="2667" b="1"/>
+            </a:lvl2pPr>
+            <a:lvl3pPr marL="1219170" indent="0">
+              <a:buNone/>
               <a:defRPr sz="2400" b="1"/>
-            </a:lvl1pPr>
-            <a:lvl2pPr marL="457200" indent="0">
-              <a:buNone/>
-              <a:defRPr sz="2000" b="1"/>
-            </a:lvl2pPr>
-            <a:lvl3pPr marL="914400" indent="0">
-              <a:buNone/>
-              <a:defRPr sz="1800" b="1"/>
             </a:lvl3pPr>
-            <a:lvl4pPr marL="1371600" indent="0">
-              <a:buNone/>
-              <a:defRPr sz="1600" b="1"/>
+            <a:lvl4pPr marL="1828754" indent="0">
+              <a:buNone/>
+              <a:defRPr sz="2133" b="1"/>
             </a:lvl4pPr>
-            <a:lvl5pPr marL="1828800" indent="0">
-              <a:buNone/>
-              <a:defRPr sz="1600" b="1"/>
+            <a:lvl5pPr marL="2438339" indent="0">
+              <a:buNone/>
+              <a:defRPr sz="2133" b="1"/>
             </a:lvl5pPr>
-            <a:lvl6pPr marL="2286000" indent="0">
-              <a:buNone/>
-              <a:defRPr sz="1600" b="1"/>
+            <a:lvl6pPr marL="3047924" indent="0">
+              <a:buNone/>
+              <a:defRPr sz="2133" b="1"/>
             </a:lvl6pPr>
-            <a:lvl7pPr marL="2743200" indent="0">
-              <a:buNone/>
-              <a:defRPr sz="1600" b="1"/>
+            <a:lvl7pPr marL="3657509" indent="0">
+              <a:buNone/>
+              <a:defRPr sz="2133" b="1"/>
             </a:lvl7pPr>
-            <a:lvl8pPr marL="3200400" indent="0">
-              <a:buNone/>
-              <a:defRPr sz="1600" b="1"/>
+            <a:lvl8pPr marL="4267093" indent="0">
+              <a:buNone/>
+              <a:defRPr sz="2133" b="1"/>
             </a:lvl8pPr>
-            <a:lvl9pPr marL="3657600" indent="0">
-              <a:buNone/>
-              <a:defRPr sz="1600" b="1"/>
+            <a:lvl9pPr marL="4876678" indent="0">
+              <a:buNone/>
+              <a:defRPr sz="2133" b="1"/>
             </a:lvl9pPr>
           </a:lstStyle>
           <a:p>
             <a:pPr lvl="0"/>
             <a:r>
-              <a:rPr lang="zh-TW" altLang="en-US" smtClean="0"/>
-              <a:t>按一下以編輯母片文字樣式</a:t>
-            </a:r>
-          </a:p>
-        </p:txBody>
-      </p:sp>
-      <p:sp>
-        <p:nvSpPr>
-          <p:cNvPr id="6" name="Content Placeholder 5"/>
+              <a:rPr lang="en-US" altLang="zh-TW"/>
+              <a:t>Click to edit Master text styles</a:t>
+            </a:r>
+          </a:p>
+        </p:txBody>
+      </p:sp>
+      <p:sp>
+        <p:nvSpPr>
+          <p:cNvPr id="6" name="內容版面配置區 5"/>
           <p:cNvSpPr>
             <a:spLocks noGrp="1"/>
           </p:cNvSpPr>
@@ -1647,82 +1696,82 @@
         </p:nvSpPr>
         <p:spPr>
           <a:xfrm>
-            <a:off x="4645025" y="2174875"/>
-            <a:ext cx="4041775" cy="3951288"/>
+            <a:off x="6193372" y="2174875"/>
+            <a:ext cx="5389033" cy="3951288"/>
           </a:xfrm>
         </p:spPr>
         <p:txBody>
           <a:bodyPr/>
           <a:lstStyle>
             <a:lvl1pPr>
-              <a:defRPr sz="2400"/>
+              <a:defRPr sz="3200"/>
             </a:lvl1pPr>
             <a:lvl2pPr>
-              <a:defRPr sz="2000"/>
+              <a:defRPr sz="2667"/>
             </a:lvl2pPr>
             <a:lvl3pPr>
-              <a:defRPr sz="1800"/>
+              <a:defRPr sz="2400"/>
             </a:lvl3pPr>
             <a:lvl4pPr>
-              <a:defRPr sz="1600"/>
+              <a:defRPr sz="2133"/>
             </a:lvl4pPr>
             <a:lvl5pPr>
-              <a:defRPr sz="1600"/>
+              <a:defRPr sz="2133"/>
             </a:lvl5pPr>
             <a:lvl6pPr>
-              <a:defRPr sz="1600"/>
+              <a:defRPr sz="2133"/>
             </a:lvl6pPr>
             <a:lvl7pPr>
-              <a:defRPr sz="1600"/>
+              <a:defRPr sz="2133"/>
             </a:lvl7pPr>
             <a:lvl8pPr>
-              <a:defRPr sz="1600"/>
+              <a:defRPr sz="2133"/>
             </a:lvl8pPr>
             <a:lvl9pPr>
-              <a:defRPr sz="1600"/>
+              <a:defRPr sz="2133"/>
             </a:lvl9pPr>
           </a:lstStyle>
           <a:p>
             <a:pPr lvl="0"/>
             <a:r>
-              <a:rPr lang="zh-TW" altLang="en-US" smtClean="0"/>
-              <a:t>按一下以編輯母片文字樣式</a:t>
+              <a:rPr lang="en-US" altLang="zh-TW"/>
+              <a:t>Click to edit Master text styles</a:t>
             </a:r>
           </a:p>
           <a:p>
             <a:pPr lvl="1"/>
             <a:r>
-              <a:rPr lang="zh-TW" altLang="en-US" smtClean="0"/>
-              <a:t>第二層</a:t>
+              <a:rPr lang="en-US" altLang="zh-TW"/>
+              <a:t>Second level</a:t>
             </a:r>
           </a:p>
           <a:p>
             <a:pPr lvl="2"/>
             <a:r>
-              <a:rPr lang="zh-TW" altLang="en-US" smtClean="0"/>
-              <a:t>第三層</a:t>
+              <a:rPr lang="en-US" altLang="zh-TW"/>
+              <a:t>Third level</a:t>
             </a:r>
           </a:p>
           <a:p>
             <a:pPr lvl="3"/>
             <a:r>
-              <a:rPr lang="zh-TW" altLang="en-US" smtClean="0"/>
-              <a:t>第四層</a:t>
+              <a:rPr lang="en-US" altLang="zh-TW"/>
+              <a:t>Fourth level</a:t>
             </a:r>
           </a:p>
           <a:p>
             <a:pPr lvl="4"/>
             <a:r>
-              <a:rPr lang="zh-TW" altLang="en-US" smtClean="0"/>
-              <a:t>第五層</a:t>
-            </a:r>
-            <a:endParaRPr lang="en-US"/>
-          </a:p>
-        </p:txBody>
-      </p:sp>
-      <p:sp>
-        <p:nvSpPr>
-          <p:cNvPr id="7" name="Date Placeholder 6"/>
+              <a:rPr lang="en-US" altLang="zh-TW"/>
+              <a:t>Fifth level</a:t>
+            </a:r>
+            <a:endParaRPr lang="zh-TW" altLang="en-US"/>
+          </a:p>
+        </p:txBody>
+      </p:sp>
+      <p:sp>
+        <p:nvSpPr>
+          <p:cNvPr id="7" name="日期版面配置區 6"/>
           <p:cNvSpPr>
             <a:spLocks noGrp="1"/>
           </p:cNvSpPr>
@@ -1737,7 +1786,7 @@
           <a:p>
             <a:fld id="{06D6E6CC-32A2-4F62-A69C-65BBAE7E02EA}" type="datetimeFigureOut">
               <a:rPr lang="zh-TW" altLang="en-US" smtClean="0"/>
-              <a:t>2014/5/3</a:t>
+              <a:t>2026/2/16</a:t>
             </a:fld>
             <a:endParaRPr lang="zh-TW" altLang="en-US"/>
           </a:p>
@@ -1745,7 +1794,7 @@
       </p:sp>
       <p:sp>
         <p:nvSpPr>
-          <p:cNvPr id="8" name="Footer Placeholder 7"/>
+          <p:cNvPr id="8" name="頁尾版面配置區 7"/>
           <p:cNvSpPr>
             <a:spLocks noGrp="1"/>
           </p:cNvSpPr>
@@ -1764,7 +1813,7 @@
       </p:sp>
       <p:sp>
         <p:nvSpPr>
-          <p:cNvPr id="9" name="Slide Number Placeholder 8"/>
+          <p:cNvPr id="9" name="投影片編號版面配置區 8"/>
           <p:cNvSpPr>
             <a:spLocks noGrp="1"/>
           </p:cNvSpPr>
@@ -1786,6 +1835,11 @@
         </p:txBody>
       </p:sp>
     </p:spTree>
+    <p:extLst>
+      <p:ext uri="{BB962C8B-B14F-4D97-AF65-F5344CB8AC3E}">
+        <p14:creationId xmlns:p14="http://schemas.microsoft.com/office/powerpoint/2010/main" val="1869496553"/>
+      </p:ext>
+    </p:extLst>
   </p:cSld>
   <p:clrMapOvr>
     <a:masterClrMapping/>
@@ -1812,7 +1866,7 @@
       </p:grpSpPr>
       <p:sp>
         <p:nvSpPr>
-          <p:cNvPr id="2" name="Title 1"/>
+          <p:cNvPr id="2" name="標題 1"/>
           <p:cNvSpPr>
             <a:spLocks noGrp="1"/>
           </p:cNvSpPr>
@@ -1826,16 +1880,16 @@
           <a:lstStyle/>
           <a:p>
             <a:r>
-              <a:rPr lang="zh-TW" altLang="en-US" smtClean="0"/>
-              <a:t>按一下以編輯母片標題樣式</a:t>
-            </a:r>
-            <a:endParaRPr lang="en-US"/>
-          </a:p>
-        </p:txBody>
-      </p:sp>
-      <p:sp>
-        <p:nvSpPr>
-          <p:cNvPr id="3" name="Date Placeholder 2"/>
+              <a:rPr lang="en-US" altLang="zh-TW"/>
+              <a:t>Click to edit Master title style</a:t>
+            </a:r>
+            <a:endParaRPr lang="zh-TW" altLang="en-US"/>
+          </a:p>
+        </p:txBody>
+      </p:sp>
+      <p:sp>
+        <p:nvSpPr>
+          <p:cNvPr id="3" name="日期版面配置區 2"/>
           <p:cNvSpPr>
             <a:spLocks noGrp="1"/>
           </p:cNvSpPr>
@@ -1850,7 +1904,7 @@
           <a:p>
             <a:fld id="{06D6E6CC-32A2-4F62-A69C-65BBAE7E02EA}" type="datetimeFigureOut">
               <a:rPr lang="zh-TW" altLang="en-US" smtClean="0"/>
-              <a:t>2014/5/3</a:t>
+              <a:t>2026/2/16</a:t>
             </a:fld>
             <a:endParaRPr lang="zh-TW" altLang="en-US"/>
           </a:p>
@@ -1858,7 +1912,7 @@
       </p:sp>
       <p:sp>
         <p:nvSpPr>
-          <p:cNvPr id="4" name="Footer Placeholder 3"/>
+          <p:cNvPr id="4" name="頁尾版面配置區 3"/>
           <p:cNvSpPr>
             <a:spLocks noGrp="1"/>
           </p:cNvSpPr>
@@ -1877,7 +1931,7 @@
       </p:sp>
       <p:sp>
         <p:nvSpPr>
-          <p:cNvPr id="5" name="Slide Number Placeholder 4"/>
+          <p:cNvPr id="5" name="投影片編號版面配置區 4"/>
           <p:cNvSpPr>
             <a:spLocks noGrp="1"/>
           </p:cNvSpPr>
@@ -1899,6 +1953,11 @@
         </p:txBody>
       </p:sp>
     </p:spTree>
+    <p:extLst>
+      <p:ext uri="{BB962C8B-B14F-4D97-AF65-F5344CB8AC3E}">
+        <p14:creationId xmlns:p14="http://schemas.microsoft.com/office/powerpoint/2010/main" val="3449636053"/>
+      </p:ext>
+    </p:extLst>
   </p:cSld>
   <p:clrMapOvr>
     <a:masterClrMapping/>
@@ -1925,7 +1984,7 @@
       </p:grpSpPr>
       <p:sp>
         <p:nvSpPr>
-          <p:cNvPr id="2" name="Date Placeholder 1"/>
+          <p:cNvPr id="2" name="日期版面配置區 1"/>
           <p:cNvSpPr>
             <a:spLocks noGrp="1"/>
           </p:cNvSpPr>
@@ -1940,7 +1999,7 @@
           <a:p>
             <a:fld id="{06D6E6CC-32A2-4F62-A69C-65BBAE7E02EA}" type="datetimeFigureOut">
               <a:rPr lang="zh-TW" altLang="en-US" smtClean="0"/>
-              <a:t>2014/5/3</a:t>
+              <a:t>2026/2/16</a:t>
             </a:fld>
             <a:endParaRPr lang="zh-TW" altLang="en-US"/>
           </a:p>
@@ -1948,7 +2007,7 @@
       </p:sp>
       <p:sp>
         <p:nvSpPr>
-          <p:cNvPr id="3" name="Footer Placeholder 2"/>
+          <p:cNvPr id="3" name="頁尾版面配置區 2"/>
           <p:cNvSpPr>
             <a:spLocks noGrp="1"/>
           </p:cNvSpPr>
@@ -1967,7 +2026,7 @@
       </p:sp>
       <p:sp>
         <p:nvSpPr>
-          <p:cNvPr id="4" name="Slide Number Placeholder 3"/>
+          <p:cNvPr id="4" name="投影片編號版面配置區 3"/>
           <p:cNvSpPr>
             <a:spLocks noGrp="1"/>
           </p:cNvSpPr>
@@ -1989,6 +2048,11 @@
         </p:txBody>
       </p:sp>
     </p:spTree>
+    <p:extLst>
+      <p:ext uri="{BB962C8B-B14F-4D97-AF65-F5344CB8AC3E}">
+        <p14:creationId xmlns:p14="http://schemas.microsoft.com/office/powerpoint/2010/main" val="849264140"/>
+      </p:ext>
+    </p:extLst>
   </p:cSld>
   <p:clrMapOvr>
     <a:masterClrMapping/>
@@ -2015,7 +2079,7 @@
       </p:grpSpPr>
       <p:sp>
         <p:nvSpPr>
-          <p:cNvPr id="2" name="Title 1"/>
+          <p:cNvPr id="2" name="標題 1"/>
           <p:cNvSpPr>
             <a:spLocks noGrp="1"/>
           </p:cNvSpPr>
@@ -2025,29 +2089,29 @@
         </p:nvSpPr>
         <p:spPr>
           <a:xfrm>
-            <a:off x="457200" y="273050"/>
-            <a:ext cx="3008313" cy="1162050"/>
+            <a:off x="609603" y="273049"/>
+            <a:ext cx="4011084" cy="1162051"/>
           </a:xfrm>
         </p:spPr>
         <p:txBody>
           <a:bodyPr anchor="b"/>
           <a:lstStyle>
             <a:lvl1pPr algn="l">
-              <a:defRPr sz="2000" b="1"/>
+              <a:defRPr sz="2667" b="1"/>
             </a:lvl1pPr>
           </a:lstStyle>
           <a:p>
             <a:r>
-              <a:rPr lang="zh-TW" altLang="en-US" smtClean="0"/>
-              <a:t>按一下以編輯母片標題樣式</a:t>
-            </a:r>
-            <a:endParaRPr lang="en-US"/>
-          </a:p>
-        </p:txBody>
-      </p:sp>
-      <p:sp>
-        <p:nvSpPr>
-          <p:cNvPr id="3" name="Content Placeholder 2"/>
+              <a:rPr lang="en-US" altLang="zh-TW"/>
+              <a:t>Click to edit Master title style</a:t>
+            </a:r>
+            <a:endParaRPr lang="zh-TW" altLang="en-US"/>
+          </a:p>
+        </p:txBody>
+      </p:sp>
+      <p:sp>
+        <p:nvSpPr>
+          <p:cNvPr id="3" name="內容版面配置區 2"/>
           <p:cNvSpPr>
             <a:spLocks noGrp="1"/>
           </p:cNvSpPr>
@@ -2057,82 +2121,82 @@
         </p:nvSpPr>
         <p:spPr>
           <a:xfrm>
-            <a:off x="3575050" y="273050"/>
-            <a:ext cx="5111750" cy="5853113"/>
+            <a:off x="4766733" y="273053"/>
+            <a:ext cx="6815667" cy="5853113"/>
           </a:xfrm>
         </p:spPr>
         <p:txBody>
           <a:bodyPr/>
           <a:lstStyle>
             <a:lvl1pPr>
-              <a:defRPr sz="3200"/>
+              <a:defRPr sz="4267"/>
             </a:lvl1pPr>
             <a:lvl2pPr>
-              <a:defRPr sz="2800"/>
+              <a:defRPr sz="3733"/>
             </a:lvl2pPr>
             <a:lvl3pPr>
-              <a:defRPr sz="2400"/>
+              <a:defRPr sz="3200"/>
             </a:lvl3pPr>
             <a:lvl4pPr>
-              <a:defRPr sz="2000"/>
+              <a:defRPr sz="2667"/>
             </a:lvl4pPr>
             <a:lvl5pPr>
-              <a:defRPr sz="2000"/>
+              <a:defRPr sz="2667"/>
             </a:lvl5pPr>
             <a:lvl6pPr>
-              <a:defRPr sz="2000"/>
+              <a:defRPr sz="2667"/>
             </a:lvl6pPr>
             <a:lvl7pPr>
-              <a:defRPr sz="2000"/>
+              <a:defRPr sz="2667"/>
             </a:lvl7pPr>
             <a:lvl8pPr>
-              <a:defRPr sz="2000"/>
+              <a:defRPr sz="2667"/>
             </a:lvl8pPr>
             <a:lvl9pPr>
-              <a:defRPr sz="2000"/>
+              <a:defRPr sz="2667"/>
             </a:lvl9pPr>
           </a:lstStyle>
           <a:p>
             <a:pPr lvl="0"/>
             <a:r>
-              <a:rPr lang="zh-TW" altLang="en-US" smtClean="0"/>
-              <a:t>按一下以編輯母片文字樣式</a:t>
+              <a:rPr lang="en-US" altLang="zh-TW"/>
+              <a:t>Click to edit Master text styles</a:t>
             </a:r>
           </a:p>
           <a:p>
             <a:pPr lvl="1"/>
             <a:r>
-              <a:rPr lang="zh-TW" altLang="en-US" smtClean="0"/>
-              <a:t>第二層</a:t>
+              <a:rPr lang="en-US" altLang="zh-TW"/>
+              <a:t>Second level</a:t>
             </a:r>
           </a:p>
           <a:p>
             <a:pPr lvl="2"/>
             <a:r>
-              <a:rPr lang="zh-TW" altLang="en-US" smtClean="0"/>
-              <a:t>第三層</a:t>
+              <a:rPr lang="en-US" altLang="zh-TW"/>
+              <a:t>Third level</a:t>
             </a:r>
           </a:p>
           <a:p>
             <a:pPr lvl="3"/>
             <a:r>
-              <a:rPr lang="zh-TW" altLang="en-US" smtClean="0"/>
-              <a:t>第四層</a:t>
+              <a:rPr lang="en-US" altLang="zh-TW"/>
+              <a:t>Fourth level</a:t>
             </a:r>
           </a:p>
           <a:p>
             <a:pPr lvl="4"/>
             <a:r>
-              <a:rPr lang="zh-TW" altLang="en-US" smtClean="0"/>
-              <a:t>第五層</a:t>
-            </a:r>
-            <a:endParaRPr lang="en-US"/>
-          </a:p>
-        </p:txBody>
-      </p:sp>
-      <p:sp>
-        <p:nvSpPr>
-          <p:cNvPr id="4" name="Text Placeholder 3"/>
+              <a:rPr lang="en-US" altLang="zh-TW"/>
+              <a:t>Fifth level</a:t>
+            </a:r>
+            <a:endParaRPr lang="zh-TW" altLang="en-US"/>
+          </a:p>
+        </p:txBody>
+      </p:sp>
+      <p:sp>
+        <p:nvSpPr>
+          <p:cNvPr id="4" name="文字版面配置區 3"/>
           <p:cNvSpPr>
             <a:spLocks noGrp="1"/>
           </p:cNvSpPr>
@@ -2142,8 +2206,8 @@
         </p:nvSpPr>
         <p:spPr>
           <a:xfrm>
-            <a:off x="457200" y="1435100"/>
-            <a:ext cx="3008313" cy="4691063"/>
+            <a:off x="609603" y="1435103"/>
+            <a:ext cx="4011084" cy="4691063"/>
           </a:xfrm>
         </p:spPr>
         <p:txBody>
@@ -2151,53 +2215,53 @@
           <a:lstStyle>
             <a:lvl1pPr marL="0" indent="0">
               <a:buNone/>
-              <a:defRPr sz="1400"/>
+              <a:defRPr sz="1867"/>
             </a:lvl1pPr>
-            <a:lvl2pPr marL="457200" indent="0">
+            <a:lvl2pPr marL="609585" indent="0">
+              <a:buNone/>
+              <a:defRPr sz="1600"/>
+            </a:lvl2pPr>
+            <a:lvl3pPr marL="1219170" indent="0">
+              <a:buNone/>
+              <a:defRPr sz="1333"/>
+            </a:lvl3pPr>
+            <a:lvl4pPr marL="1828754" indent="0">
               <a:buNone/>
               <a:defRPr sz="1200"/>
-            </a:lvl2pPr>
-            <a:lvl3pPr marL="914400" indent="0">
-              <a:buNone/>
-              <a:defRPr sz="1000"/>
-            </a:lvl3pPr>
-            <a:lvl4pPr marL="1371600" indent="0">
-              <a:buNone/>
-              <a:defRPr sz="900"/>
             </a:lvl4pPr>
-            <a:lvl5pPr marL="1828800" indent="0">
-              <a:buNone/>
-              <a:defRPr sz="900"/>
+            <a:lvl5pPr marL="2438339" indent="0">
+              <a:buNone/>
+              <a:defRPr sz="1200"/>
             </a:lvl5pPr>
-            <a:lvl6pPr marL="2286000" indent="0">
-              <a:buNone/>
-              <a:defRPr sz="900"/>
+            <a:lvl6pPr marL="3047924" indent="0">
+              <a:buNone/>
+              <a:defRPr sz="1200"/>
             </a:lvl6pPr>
-            <a:lvl7pPr marL="2743200" indent="0">
-              <a:buNone/>
-              <a:defRPr sz="900"/>
+            <a:lvl7pPr marL="3657509" indent="0">
+              <a:buNone/>
+              <a:defRPr sz="1200"/>
             </a:lvl7pPr>
-            <a:lvl8pPr marL="3200400" indent="0">
-              <a:buNone/>
-              <a:defRPr sz="900"/>
+            <a:lvl8pPr marL="4267093" indent="0">
+              <a:buNone/>
+              <a:defRPr sz="1200"/>
             </a:lvl8pPr>
-            <a:lvl9pPr marL="3657600" indent="0">
-              <a:buNone/>
-              <a:defRPr sz="900"/>
+            <a:lvl9pPr marL="4876678" indent="0">
+              <a:buNone/>
+              <a:defRPr sz="1200"/>
             </a:lvl9pPr>
           </a:lstStyle>
           <a:p>
             <a:pPr lvl="0"/>
             <a:r>
-              <a:rPr lang="zh-TW" altLang="en-US" smtClean="0"/>
-              <a:t>按一下以編輯母片文字樣式</a:t>
-            </a:r>
-          </a:p>
-        </p:txBody>
-      </p:sp>
-      <p:sp>
-        <p:nvSpPr>
-          <p:cNvPr id="5" name="Date Placeholder 4"/>
+              <a:rPr lang="en-US" altLang="zh-TW"/>
+              <a:t>Click to edit Master text styles</a:t>
+            </a:r>
+          </a:p>
+        </p:txBody>
+      </p:sp>
+      <p:sp>
+        <p:nvSpPr>
+          <p:cNvPr id="5" name="日期版面配置區 4"/>
           <p:cNvSpPr>
             <a:spLocks noGrp="1"/>
           </p:cNvSpPr>
@@ -2212,7 +2276,7 @@
           <a:p>
             <a:fld id="{06D6E6CC-32A2-4F62-A69C-65BBAE7E02EA}" type="datetimeFigureOut">
               <a:rPr lang="zh-TW" altLang="en-US" smtClean="0"/>
-              <a:t>2014/5/3</a:t>
+              <a:t>2026/2/16</a:t>
             </a:fld>
             <a:endParaRPr lang="zh-TW" altLang="en-US"/>
           </a:p>
@@ -2220,7 +2284,7 @@
       </p:sp>
       <p:sp>
         <p:nvSpPr>
-          <p:cNvPr id="6" name="Footer Placeholder 5"/>
+          <p:cNvPr id="6" name="頁尾版面配置區 5"/>
           <p:cNvSpPr>
             <a:spLocks noGrp="1"/>
           </p:cNvSpPr>
@@ -2239,7 +2303,7 @@
       </p:sp>
       <p:sp>
         <p:nvSpPr>
-          <p:cNvPr id="7" name="Slide Number Placeholder 6"/>
+          <p:cNvPr id="7" name="投影片編號版面配置區 6"/>
           <p:cNvSpPr>
             <a:spLocks noGrp="1"/>
           </p:cNvSpPr>
@@ -2261,6 +2325,11 @@
         </p:txBody>
       </p:sp>
     </p:spTree>
+    <p:extLst>
+      <p:ext uri="{BB962C8B-B14F-4D97-AF65-F5344CB8AC3E}">
+        <p14:creationId xmlns:p14="http://schemas.microsoft.com/office/powerpoint/2010/main" val="3307942427"/>
+      </p:ext>
+    </p:extLst>
   </p:cSld>
   <p:clrMapOvr>
     <a:masterClrMapping/>
@@ -2287,7 +2356,7 @@
       </p:grpSpPr>
       <p:sp>
         <p:nvSpPr>
-          <p:cNvPr id="2" name="Title 1"/>
+          <p:cNvPr id="2" name="標題 1"/>
           <p:cNvSpPr>
             <a:spLocks noGrp="1"/>
           </p:cNvSpPr>
@@ -2297,29 +2366,29 @@
         </p:nvSpPr>
         <p:spPr>
           <a:xfrm>
-            <a:off x="1792288" y="4800600"/>
-            <a:ext cx="5486400" cy="566738"/>
+            <a:off x="2389717" y="4800601"/>
+            <a:ext cx="7315200" cy="566739"/>
           </a:xfrm>
         </p:spPr>
         <p:txBody>
           <a:bodyPr anchor="b"/>
           <a:lstStyle>
             <a:lvl1pPr algn="l">
-              <a:defRPr sz="2000" b="1"/>
+              <a:defRPr sz="2667" b="1"/>
             </a:lvl1pPr>
           </a:lstStyle>
           <a:p>
             <a:r>
-              <a:rPr lang="zh-TW" altLang="en-US" smtClean="0"/>
-              <a:t>按一下以編輯母片標題樣式</a:t>
-            </a:r>
-            <a:endParaRPr lang="en-US"/>
-          </a:p>
-        </p:txBody>
-      </p:sp>
-      <p:sp>
-        <p:nvSpPr>
-          <p:cNvPr id="3" name="Picture Placeholder 2"/>
+              <a:rPr lang="en-US" altLang="zh-TW"/>
+              <a:t>Click to edit Master title style</a:t>
+            </a:r>
+            <a:endParaRPr lang="zh-TW" altLang="en-US"/>
+          </a:p>
+        </p:txBody>
+      </p:sp>
+      <p:sp>
+        <p:nvSpPr>
+          <p:cNvPr id="3" name="圖片版面配置區 2"/>
           <p:cNvSpPr>
             <a:spLocks noGrp="1"/>
           </p:cNvSpPr>
@@ -2329,8 +2398,8 @@
         </p:nvSpPr>
         <p:spPr>
           <a:xfrm>
-            <a:off x="1792288" y="612775"/>
-            <a:ext cx="5486400" cy="4114800"/>
+            <a:off x="2389717" y="612775"/>
+            <a:ext cx="7315200" cy="4114800"/>
           </a:xfrm>
         </p:spPr>
         <p:txBody>
@@ -2338,53 +2407,53 @@
           <a:lstStyle>
             <a:lvl1pPr marL="0" indent="0">
               <a:buNone/>
+              <a:defRPr sz="4267"/>
+            </a:lvl1pPr>
+            <a:lvl2pPr marL="609585" indent="0">
+              <a:buNone/>
+              <a:defRPr sz="3733"/>
+            </a:lvl2pPr>
+            <a:lvl3pPr marL="1219170" indent="0">
+              <a:buNone/>
               <a:defRPr sz="3200"/>
-            </a:lvl1pPr>
-            <a:lvl2pPr marL="457200" indent="0">
-              <a:buNone/>
-              <a:defRPr sz="2800"/>
-            </a:lvl2pPr>
-            <a:lvl3pPr marL="914400" indent="0">
-              <a:buNone/>
-              <a:defRPr sz="2400"/>
             </a:lvl3pPr>
-            <a:lvl4pPr marL="1371600" indent="0">
-              <a:buNone/>
-              <a:defRPr sz="2000"/>
+            <a:lvl4pPr marL="1828754" indent="0">
+              <a:buNone/>
+              <a:defRPr sz="2667"/>
             </a:lvl4pPr>
-            <a:lvl5pPr marL="1828800" indent="0">
-              <a:buNone/>
-              <a:defRPr sz="2000"/>
+            <a:lvl5pPr marL="2438339" indent="0">
+              <a:buNone/>
+              <a:defRPr sz="2667"/>
             </a:lvl5pPr>
-            <a:lvl6pPr marL="2286000" indent="0">
-              <a:buNone/>
-              <a:defRPr sz="2000"/>
+            <a:lvl6pPr marL="3047924" indent="0">
+              <a:buNone/>
+              <a:defRPr sz="2667"/>
             </a:lvl6pPr>
-            <a:lvl7pPr marL="2743200" indent="0">
-              <a:buNone/>
-              <a:defRPr sz="2000"/>
+            <a:lvl7pPr marL="3657509" indent="0">
+              <a:buNone/>
+              <a:defRPr sz="2667"/>
             </a:lvl7pPr>
-            <a:lvl8pPr marL="3200400" indent="0">
-              <a:buNone/>
-              <a:defRPr sz="2000"/>
+            <a:lvl8pPr marL="4267093" indent="0">
+              <a:buNone/>
+              <a:defRPr sz="2667"/>
             </a:lvl8pPr>
-            <a:lvl9pPr marL="3657600" indent="0">
-              <a:buNone/>
-              <a:defRPr sz="2000"/>
+            <a:lvl9pPr marL="4876678" indent="0">
+              <a:buNone/>
+              <a:defRPr sz="2667"/>
             </a:lvl9pPr>
           </a:lstStyle>
           <a:p>
             <a:r>
-              <a:rPr lang="zh-TW" altLang="en-US" smtClean="0"/>
-              <a:t>按一下圖示以新增圖片</a:t>
-            </a:r>
-            <a:endParaRPr lang="en-US"/>
-          </a:p>
-        </p:txBody>
-      </p:sp>
-      <p:sp>
-        <p:nvSpPr>
-          <p:cNvPr id="4" name="Text Placeholder 3"/>
+              <a:rPr lang="en-US" altLang="zh-TW"/>
+              <a:t>Click icon to add picture</a:t>
+            </a:r>
+            <a:endParaRPr lang="zh-TW" altLang="en-US"/>
+          </a:p>
+        </p:txBody>
+      </p:sp>
+      <p:sp>
+        <p:nvSpPr>
+          <p:cNvPr id="4" name="文字版面配置區 3"/>
           <p:cNvSpPr>
             <a:spLocks noGrp="1"/>
           </p:cNvSpPr>
@@ -2394,8 +2463,8 @@
         </p:nvSpPr>
         <p:spPr>
           <a:xfrm>
-            <a:off x="1792288" y="5367338"/>
-            <a:ext cx="5486400" cy="804862"/>
+            <a:off x="2389717" y="5367339"/>
+            <a:ext cx="7315200" cy="804863"/>
           </a:xfrm>
         </p:spPr>
         <p:txBody>
@@ -2403,53 +2472,53 @@
           <a:lstStyle>
             <a:lvl1pPr marL="0" indent="0">
               <a:buNone/>
-              <a:defRPr sz="1400"/>
+              <a:defRPr sz="1867"/>
             </a:lvl1pPr>
-            <a:lvl2pPr marL="457200" indent="0">
+            <a:lvl2pPr marL="609585" indent="0">
+              <a:buNone/>
+              <a:defRPr sz="1600"/>
+            </a:lvl2pPr>
+            <a:lvl3pPr marL="1219170" indent="0">
+              <a:buNone/>
+              <a:defRPr sz="1333"/>
+            </a:lvl3pPr>
+            <a:lvl4pPr marL="1828754" indent="0">
               <a:buNone/>
               <a:defRPr sz="1200"/>
-            </a:lvl2pPr>
-            <a:lvl3pPr marL="914400" indent="0">
-              <a:buNone/>
-              <a:defRPr sz="1000"/>
-            </a:lvl3pPr>
-            <a:lvl4pPr marL="1371600" indent="0">
-              <a:buNone/>
-              <a:defRPr sz="900"/>
             </a:lvl4pPr>
-            <a:lvl5pPr marL="1828800" indent="0">
-              <a:buNone/>
-              <a:defRPr sz="900"/>
+            <a:lvl5pPr marL="2438339" indent="0">
+              <a:buNone/>
+              <a:defRPr sz="1200"/>
             </a:lvl5pPr>
-            <a:lvl6pPr marL="2286000" indent="0">
-              <a:buNone/>
-              <a:defRPr sz="900"/>
+            <a:lvl6pPr marL="3047924" indent="0">
+              <a:buNone/>
+              <a:defRPr sz="1200"/>
             </a:lvl6pPr>
-            <a:lvl7pPr marL="2743200" indent="0">
-              <a:buNone/>
-              <a:defRPr sz="900"/>
+            <a:lvl7pPr marL="3657509" indent="0">
+              <a:buNone/>
+              <a:defRPr sz="1200"/>
             </a:lvl7pPr>
-            <a:lvl8pPr marL="3200400" indent="0">
-              <a:buNone/>
-              <a:defRPr sz="900"/>
+            <a:lvl8pPr marL="4267093" indent="0">
+              <a:buNone/>
+              <a:defRPr sz="1200"/>
             </a:lvl8pPr>
-            <a:lvl9pPr marL="3657600" indent="0">
-              <a:buNone/>
-              <a:defRPr sz="900"/>
+            <a:lvl9pPr marL="4876678" indent="0">
+              <a:buNone/>
+              <a:defRPr sz="1200"/>
             </a:lvl9pPr>
           </a:lstStyle>
           <a:p>
             <a:pPr lvl="0"/>
             <a:r>
-              <a:rPr lang="zh-TW" altLang="en-US" smtClean="0"/>
-              <a:t>按一下以編輯母片文字樣式</a:t>
-            </a:r>
-          </a:p>
-        </p:txBody>
-      </p:sp>
-      <p:sp>
-        <p:nvSpPr>
-          <p:cNvPr id="5" name="Date Placeholder 4"/>
+              <a:rPr lang="en-US" altLang="zh-TW"/>
+              <a:t>Click to edit Master text styles</a:t>
+            </a:r>
+          </a:p>
+        </p:txBody>
+      </p:sp>
+      <p:sp>
+        <p:nvSpPr>
+          <p:cNvPr id="5" name="日期版面配置區 4"/>
           <p:cNvSpPr>
             <a:spLocks noGrp="1"/>
           </p:cNvSpPr>
@@ -2464,7 +2533,7 @@
           <a:p>
             <a:fld id="{06D6E6CC-32A2-4F62-A69C-65BBAE7E02EA}" type="datetimeFigureOut">
               <a:rPr lang="zh-TW" altLang="en-US" smtClean="0"/>
-              <a:t>2014/5/3</a:t>
+              <a:t>2026/2/16</a:t>
             </a:fld>
             <a:endParaRPr lang="zh-TW" altLang="en-US"/>
           </a:p>
@@ -2472,7 +2541,7 @@
       </p:sp>
       <p:sp>
         <p:nvSpPr>
-          <p:cNvPr id="6" name="Footer Placeholder 5"/>
+          <p:cNvPr id="6" name="頁尾版面配置區 5"/>
           <p:cNvSpPr>
             <a:spLocks noGrp="1"/>
           </p:cNvSpPr>
@@ -2491,7 +2560,7 @@
       </p:sp>
       <p:sp>
         <p:nvSpPr>
-          <p:cNvPr id="7" name="Slide Number Placeholder 6"/>
+          <p:cNvPr id="7" name="投影片編號版面配置區 6"/>
           <p:cNvSpPr>
             <a:spLocks noGrp="1"/>
           </p:cNvSpPr>
@@ -2513,6 +2582,11 @@
         </p:txBody>
       </p:sp>
     </p:spTree>
+    <p:extLst>
+      <p:ext uri="{BB962C8B-B14F-4D97-AF65-F5344CB8AC3E}">
+        <p14:creationId xmlns:p14="http://schemas.microsoft.com/office/powerpoint/2010/main" val="1924815875"/>
+      </p:ext>
+    </p:extLst>
   </p:cSld>
   <p:clrMapOvr>
     <a:masterClrMapping/>
@@ -2526,13 +2600,9 @@
     <p:bg>
       <p:bgPr>
         <a:blipFill dpi="0" rotWithShape="1">
-          <a:blip r:embed="rId13">
-            <a:lum/>
-          </a:blip>
+          <a:blip r:embed="rId13"/>
           <a:srcRect/>
-          <a:stretch>
-            <a:fillRect/>
-          </a:stretch>
+          <a:tile tx="0" ty="0" sx="100000" sy="100000" flip="none" algn="tl"/>
         </a:blipFill>
         <a:effectLst/>
       </p:bgPr>
@@ -2553,7 +2623,7 @@
       </p:grpSpPr>
       <p:sp>
         <p:nvSpPr>
-          <p:cNvPr id="2" name="Title Placeholder 1"/>
+          <p:cNvPr id="2" name="標題版面配置區 1"/>
           <p:cNvSpPr>
             <a:spLocks noGrp="1"/>
           </p:cNvSpPr>
@@ -2563,8 +2633,8 @@
         </p:nvSpPr>
         <p:spPr>
           <a:xfrm>
-            <a:off x="457200" y="274638"/>
-            <a:ext cx="8229600" cy="1143000"/>
+            <a:off x="609600" y="274637"/>
+            <a:ext cx="10972800" cy="1143000"/>
           </a:xfrm>
           <a:prstGeom prst="rect">
             <a:avLst/>
@@ -2577,16 +2647,15 @@
           <a:lstStyle/>
           <a:p>
             <a:r>
-              <a:rPr lang="zh-TW" altLang="en-US" smtClean="0"/>
+              <a:rPr lang="zh-TW" altLang="en-US"/>
               <a:t>按一下以編輯母片標題樣式</a:t>
             </a:r>
-            <a:endParaRPr lang="en-US"/>
-          </a:p>
-        </p:txBody>
-      </p:sp>
-      <p:sp>
-        <p:nvSpPr>
-          <p:cNvPr id="3" name="Text Placeholder 2"/>
+          </a:p>
+        </p:txBody>
+      </p:sp>
+      <p:sp>
+        <p:nvSpPr>
+          <p:cNvPr id="3" name="文字版面配置區 2"/>
           <p:cNvSpPr>
             <a:spLocks noGrp="1"/>
           </p:cNvSpPr>
@@ -2596,8 +2665,8 @@
         </p:nvSpPr>
         <p:spPr>
           <a:xfrm>
-            <a:off x="457200" y="1600200"/>
-            <a:ext cx="8229600" cy="4525963"/>
+            <a:off x="609600" y="1600201"/>
+            <a:ext cx="10972800" cy="4525963"/>
           </a:xfrm>
           <a:prstGeom prst="rect">
             <a:avLst/>
@@ -2611,44 +2680,43 @@
           <a:p>
             <a:pPr lvl="0"/>
             <a:r>
-              <a:rPr lang="zh-TW" altLang="en-US" smtClean="0"/>
+              <a:rPr lang="zh-TW" altLang="en-US"/>
               <a:t>按一下以編輯母片文字樣式</a:t>
             </a:r>
           </a:p>
           <a:p>
             <a:pPr lvl="1"/>
             <a:r>
-              <a:rPr lang="zh-TW" altLang="en-US" smtClean="0"/>
+              <a:rPr lang="zh-TW" altLang="en-US"/>
               <a:t>第二層</a:t>
             </a:r>
           </a:p>
           <a:p>
             <a:pPr lvl="2"/>
             <a:r>
-              <a:rPr lang="zh-TW" altLang="en-US" smtClean="0"/>
+              <a:rPr lang="zh-TW" altLang="en-US"/>
               <a:t>第三層</a:t>
             </a:r>
           </a:p>
           <a:p>
             <a:pPr lvl="3"/>
             <a:r>
-              <a:rPr lang="zh-TW" altLang="en-US" smtClean="0"/>
+              <a:rPr lang="zh-TW" altLang="en-US"/>
               <a:t>第四層</a:t>
             </a:r>
           </a:p>
           <a:p>
             <a:pPr lvl="4"/>
             <a:r>
-              <a:rPr lang="zh-TW" altLang="en-US" smtClean="0"/>
+              <a:rPr lang="zh-TW" altLang="en-US"/>
               <a:t>第五層</a:t>
             </a:r>
-            <a:endParaRPr lang="en-US"/>
-          </a:p>
-        </p:txBody>
-      </p:sp>
-      <p:sp>
-        <p:nvSpPr>
-          <p:cNvPr id="4" name="Date Placeholder 3"/>
+          </a:p>
+        </p:txBody>
+      </p:sp>
+      <p:sp>
+        <p:nvSpPr>
+          <p:cNvPr id="4" name="日期版面配置區 3"/>
           <p:cNvSpPr>
             <a:spLocks noGrp="1"/>
           </p:cNvSpPr>
@@ -2658,8 +2726,8 @@
         </p:nvSpPr>
         <p:spPr>
           <a:xfrm>
-            <a:off x="457200" y="6356350"/>
-            <a:ext cx="2133600" cy="365125"/>
+            <a:off x="609600" y="6356352"/>
+            <a:ext cx="2844800" cy="365125"/>
           </a:xfrm>
           <a:prstGeom prst="rect">
             <a:avLst/>
@@ -2669,7 +2737,7 @@
           <a:bodyPr vert="horz" lIns="91440" tIns="45720" rIns="91440" bIns="45720" rtlCol="0" anchor="ctr"/>
           <a:lstStyle>
             <a:lvl1pPr algn="l">
-              <a:defRPr sz="1200">
+              <a:defRPr sz="1600">
                 <a:solidFill>
                   <a:schemeClr val="tx1">
                     <a:tint val="75000"/>
@@ -2681,7 +2749,7 @@
           <a:p>
             <a:fld id="{06D6E6CC-32A2-4F62-A69C-65BBAE7E02EA}" type="datetimeFigureOut">
               <a:rPr lang="zh-TW" altLang="en-US" smtClean="0"/>
-              <a:t>2014/5/3</a:t>
+              <a:t>2026/2/16</a:t>
             </a:fld>
             <a:endParaRPr lang="zh-TW" altLang="en-US"/>
           </a:p>
@@ -2689,7 +2757,7 @@
       </p:sp>
       <p:sp>
         <p:nvSpPr>
-          <p:cNvPr id="5" name="Footer Placeholder 4"/>
+          <p:cNvPr id="5" name="頁尾版面配置區 4"/>
           <p:cNvSpPr>
             <a:spLocks noGrp="1"/>
           </p:cNvSpPr>
@@ -2699,8 +2767,8 @@
         </p:nvSpPr>
         <p:spPr>
           <a:xfrm>
-            <a:off x="3124200" y="6356350"/>
-            <a:ext cx="2895600" cy="365125"/>
+            <a:off x="4165600" y="6356352"/>
+            <a:ext cx="3860800" cy="365125"/>
           </a:xfrm>
           <a:prstGeom prst="rect">
             <a:avLst/>
@@ -2710,7 +2778,7 @@
           <a:bodyPr vert="horz" lIns="91440" tIns="45720" rIns="91440" bIns="45720" rtlCol="0" anchor="ctr"/>
           <a:lstStyle>
             <a:lvl1pPr algn="ctr">
-              <a:defRPr sz="1200">
+              <a:defRPr sz="1600">
                 <a:solidFill>
                   <a:schemeClr val="tx1">
                     <a:tint val="75000"/>
@@ -2726,7 +2794,7 @@
       </p:sp>
       <p:sp>
         <p:nvSpPr>
-          <p:cNvPr id="6" name="Slide Number Placeholder 5"/>
+          <p:cNvPr id="6" name="投影片編號版面配置區 5"/>
           <p:cNvSpPr>
             <a:spLocks noGrp="1"/>
           </p:cNvSpPr>
@@ -2736,8 +2804,8 @@
         </p:nvSpPr>
         <p:spPr>
           <a:xfrm>
-            <a:off x="6553200" y="6356350"/>
-            <a:ext cx="2133600" cy="365125"/>
+            <a:off x="8737600" y="6356352"/>
+            <a:ext cx="2844800" cy="365125"/>
           </a:xfrm>
           <a:prstGeom prst="rect">
             <a:avLst/>
@@ -2747,7 +2815,7 @@
           <a:bodyPr vert="horz" lIns="91440" tIns="45720" rIns="91440" bIns="45720" rtlCol="0" anchor="ctr"/>
           <a:lstStyle>
             <a:lvl1pPr algn="r">
-              <a:defRPr sz="1200">
+              <a:defRPr sz="1600">
                 <a:solidFill>
                   <a:schemeClr val="tx1">
                     <a:tint val="75000"/>
@@ -2766,29 +2834,34 @@
         </p:txBody>
       </p:sp>
     </p:spTree>
+    <p:extLst>
+      <p:ext uri="{BB962C8B-B14F-4D97-AF65-F5344CB8AC3E}">
+        <p14:creationId xmlns:p14="http://schemas.microsoft.com/office/powerpoint/2010/main" val="4268486064"/>
+      </p:ext>
+    </p:extLst>
   </p:cSld>
   <p:clrMap bg1="lt1" tx1="dk1" bg2="lt2" tx2="dk2" accent1="accent1" accent2="accent2" accent3="accent3" accent4="accent4" accent5="accent5" accent6="accent6" hlink="hlink" folHlink="folHlink"/>
   <p:sldLayoutIdLst>
-    <p:sldLayoutId id="2147483661" r:id="rId1"/>
-    <p:sldLayoutId id="2147483662" r:id="rId2"/>
-    <p:sldLayoutId id="2147483663" r:id="rId3"/>
-    <p:sldLayoutId id="2147483664" r:id="rId4"/>
-    <p:sldLayoutId id="2147483665" r:id="rId5"/>
-    <p:sldLayoutId id="2147483666" r:id="rId6"/>
-    <p:sldLayoutId id="2147483667" r:id="rId7"/>
-    <p:sldLayoutId id="2147483668" r:id="rId8"/>
-    <p:sldLayoutId id="2147483669" r:id="rId9"/>
-    <p:sldLayoutId id="2147483670" r:id="rId10"/>
-    <p:sldLayoutId id="2147483671" r:id="rId11"/>
+    <p:sldLayoutId id="2147483673" r:id="rId1"/>
+    <p:sldLayoutId id="2147483674" r:id="rId2"/>
+    <p:sldLayoutId id="2147483675" r:id="rId3"/>
+    <p:sldLayoutId id="2147483676" r:id="rId4"/>
+    <p:sldLayoutId id="2147483677" r:id="rId5"/>
+    <p:sldLayoutId id="2147483678" r:id="rId6"/>
+    <p:sldLayoutId id="2147483679" r:id="rId7"/>
+    <p:sldLayoutId id="2147483680" r:id="rId8"/>
+    <p:sldLayoutId id="2147483681" r:id="rId9"/>
+    <p:sldLayoutId id="2147483682" r:id="rId10"/>
+    <p:sldLayoutId id="2147483683" r:id="rId11"/>
   </p:sldLayoutIdLst>
   <p:txStyles>
     <p:titleStyle>
-      <a:lvl1pPr algn="ctr" defTabSz="914400" rtl="0" eaLnBrk="1" latinLnBrk="0" hangingPunct="1">
+      <a:lvl1pPr algn="ctr" defTabSz="1219170" rtl="0" eaLnBrk="1" latinLnBrk="0" hangingPunct="1">
         <a:spcBef>
           <a:spcPct val="0"/>
         </a:spcBef>
         <a:buNone/>
-        <a:defRPr sz="4400" kern="1200">
+        <a:defRPr sz="5867" kern="1200">
           <a:solidFill>
             <a:schemeClr val="tx1"/>
           </a:solidFill>
@@ -2799,11 +2872,41 @@
       </a:lvl1pPr>
     </p:titleStyle>
     <p:bodyStyle>
-      <a:lvl1pPr marL="342900" indent="-342900" algn="l" defTabSz="914400" rtl="0" eaLnBrk="1" latinLnBrk="0" hangingPunct="1">
+      <a:lvl1pPr marL="457189" indent="-457189" algn="l" defTabSz="1219170" rtl="0" eaLnBrk="1" latinLnBrk="0" hangingPunct="1">
         <a:spcBef>
           <a:spcPct val="20000"/>
         </a:spcBef>
-        <a:buFont typeface="Arial" pitchFamily="34" charset="0"/>
+        <a:buFont typeface="Arial" panose="02080604020202020204" pitchFamily="34" charset="0"/>
+        <a:buChar char="•"/>
+        <a:defRPr sz="4267" kern="1200">
+          <a:solidFill>
+            <a:schemeClr val="tx1"/>
+          </a:solidFill>
+          <a:latin typeface="+mn-lt"/>
+          <a:ea typeface="+mn-ea"/>
+          <a:cs typeface="+mn-cs"/>
+        </a:defRPr>
+      </a:lvl1pPr>
+      <a:lvl2pPr marL="990575" indent="-380990" algn="l" defTabSz="1219170" rtl="0" eaLnBrk="1" latinLnBrk="0" hangingPunct="1">
+        <a:spcBef>
+          <a:spcPct val="20000"/>
+        </a:spcBef>
+        <a:buFont typeface="Arial" panose="02080604020202020204" pitchFamily="34" charset="0"/>
+        <a:buChar char="–"/>
+        <a:defRPr sz="3733" kern="1200">
+          <a:solidFill>
+            <a:schemeClr val="tx1"/>
+          </a:solidFill>
+          <a:latin typeface="+mn-lt"/>
+          <a:ea typeface="+mn-ea"/>
+          <a:cs typeface="+mn-cs"/>
+        </a:defRPr>
+      </a:lvl2pPr>
+      <a:lvl3pPr marL="1523962" indent="-304792" algn="l" defTabSz="1219170" rtl="0" eaLnBrk="1" latinLnBrk="0" hangingPunct="1">
+        <a:spcBef>
+          <a:spcPct val="20000"/>
+        </a:spcBef>
+        <a:buFont typeface="Arial" panose="02080604020202020204" pitchFamily="34" charset="0"/>
         <a:buChar char="•"/>
         <a:defRPr sz="3200" kern="1200">
           <a:solidFill>
@@ -2813,44 +2916,14 @@
           <a:ea typeface="+mn-ea"/>
           <a:cs typeface="+mn-cs"/>
         </a:defRPr>
-      </a:lvl1pPr>
-      <a:lvl2pPr marL="742950" indent="-285750" algn="l" defTabSz="914400" rtl="0" eaLnBrk="1" latinLnBrk="0" hangingPunct="1">
+      </a:lvl3pPr>
+      <a:lvl4pPr marL="2133547" indent="-304792" algn="l" defTabSz="1219170" rtl="0" eaLnBrk="1" latinLnBrk="0" hangingPunct="1">
         <a:spcBef>
           <a:spcPct val="20000"/>
         </a:spcBef>
-        <a:buFont typeface="Arial" pitchFamily="34" charset="0"/>
+        <a:buFont typeface="Arial" panose="02080604020202020204" pitchFamily="34" charset="0"/>
         <a:buChar char="–"/>
-        <a:defRPr sz="2800" kern="1200">
-          <a:solidFill>
-            <a:schemeClr val="tx1"/>
-          </a:solidFill>
-          <a:latin typeface="+mn-lt"/>
-          <a:ea typeface="+mn-ea"/>
-          <a:cs typeface="+mn-cs"/>
-        </a:defRPr>
-      </a:lvl2pPr>
-      <a:lvl3pPr marL="1143000" indent="-228600" algn="l" defTabSz="914400" rtl="0" eaLnBrk="1" latinLnBrk="0" hangingPunct="1">
-        <a:spcBef>
-          <a:spcPct val="20000"/>
-        </a:spcBef>
-        <a:buFont typeface="Arial" pitchFamily="34" charset="0"/>
-        <a:buChar char="•"/>
-        <a:defRPr sz="2400" kern="1200">
-          <a:solidFill>
-            <a:schemeClr val="tx1"/>
-          </a:solidFill>
-          <a:latin typeface="+mn-lt"/>
-          <a:ea typeface="+mn-ea"/>
-          <a:cs typeface="+mn-cs"/>
-        </a:defRPr>
-      </a:lvl3pPr>
-      <a:lvl4pPr marL="1600200" indent="-228600" algn="l" defTabSz="914400" rtl="0" eaLnBrk="1" latinLnBrk="0" hangingPunct="1">
-        <a:spcBef>
-          <a:spcPct val="20000"/>
-        </a:spcBef>
-        <a:buFont typeface="Arial" pitchFamily="34" charset="0"/>
-        <a:buChar char="–"/>
-        <a:defRPr sz="2000" kern="1200">
+        <a:defRPr sz="2667" kern="1200">
           <a:solidFill>
             <a:schemeClr val="tx1"/>
           </a:solidFill>
@@ -2859,13 +2932,13 @@
           <a:cs typeface="+mn-cs"/>
         </a:defRPr>
       </a:lvl4pPr>
-      <a:lvl5pPr marL="2057400" indent="-228600" algn="l" defTabSz="914400" rtl="0" eaLnBrk="1" latinLnBrk="0" hangingPunct="1">
+      <a:lvl5pPr marL="2743131" indent="-304792" algn="l" defTabSz="1219170" rtl="0" eaLnBrk="1" latinLnBrk="0" hangingPunct="1">
         <a:spcBef>
           <a:spcPct val="20000"/>
         </a:spcBef>
-        <a:buFont typeface="Arial" pitchFamily="34" charset="0"/>
+        <a:buFont typeface="Arial" panose="02080604020202020204" pitchFamily="34" charset="0"/>
         <a:buChar char="»"/>
-        <a:defRPr sz="2000" kern="1200">
+        <a:defRPr sz="2667" kern="1200">
           <a:solidFill>
             <a:schemeClr val="tx1"/>
           </a:solidFill>
@@ -2874,13 +2947,13 @@
           <a:cs typeface="+mn-cs"/>
         </a:defRPr>
       </a:lvl5pPr>
-      <a:lvl6pPr marL="2514600" indent="-228600" algn="l" defTabSz="914400" rtl="0" eaLnBrk="1" latinLnBrk="0" hangingPunct="1">
+      <a:lvl6pPr marL="3352716" indent="-304792" algn="l" defTabSz="1219170" rtl="0" eaLnBrk="1" latinLnBrk="0" hangingPunct="1">
         <a:spcBef>
           <a:spcPct val="20000"/>
         </a:spcBef>
-        <a:buFont typeface="Arial" pitchFamily="34" charset="0"/>
+        <a:buFont typeface="Arial" panose="02080604020202020204" pitchFamily="34" charset="0"/>
         <a:buChar char="•"/>
-        <a:defRPr sz="2000" kern="1200">
+        <a:defRPr sz="2667" kern="1200">
           <a:solidFill>
             <a:schemeClr val="tx1"/>
           </a:solidFill>
@@ -2889,13 +2962,13 @@
           <a:cs typeface="+mn-cs"/>
         </a:defRPr>
       </a:lvl6pPr>
-      <a:lvl7pPr marL="2971800" indent="-228600" algn="l" defTabSz="914400" rtl="0" eaLnBrk="1" latinLnBrk="0" hangingPunct="1">
+      <a:lvl7pPr marL="3962301" indent="-304792" algn="l" defTabSz="1219170" rtl="0" eaLnBrk="1" latinLnBrk="0" hangingPunct="1">
         <a:spcBef>
           <a:spcPct val="20000"/>
         </a:spcBef>
-        <a:buFont typeface="Arial" pitchFamily="34" charset="0"/>
+        <a:buFont typeface="Arial" panose="02080604020202020204" pitchFamily="34" charset="0"/>
         <a:buChar char="•"/>
-        <a:defRPr sz="2000" kern="1200">
+        <a:defRPr sz="2667" kern="1200">
           <a:solidFill>
             <a:schemeClr val="tx1"/>
           </a:solidFill>
@@ -2904,13 +2977,13 @@
           <a:cs typeface="+mn-cs"/>
         </a:defRPr>
       </a:lvl7pPr>
-      <a:lvl8pPr marL="3429000" indent="-228600" algn="l" defTabSz="914400" rtl="0" eaLnBrk="1" latinLnBrk="0" hangingPunct="1">
+      <a:lvl8pPr marL="4571886" indent="-304792" algn="l" defTabSz="1219170" rtl="0" eaLnBrk="1" latinLnBrk="0" hangingPunct="1">
         <a:spcBef>
           <a:spcPct val="20000"/>
         </a:spcBef>
-        <a:buFont typeface="Arial" pitchFamily="34" charset="0"/>
+        <a:buFont typeface="Arial" panose="02080604020202020204" pitchFamily="34" charset="0"/>
         <a:buChar char="•"/>
-        <a:defRPr sz="2000" kern="1200">
+        <a:defRPr sz="2667" kern="1200">
           <a:solidFill>
             <a:schemeClr val="tx1"/>
           </a:solidFill>
@@ -2919,13 +2992,13 @@
           <a:cs typeface="+mn-cs"/>
         </a:defRPr>
       </a:lvl8pPr>
-      <a:lvl9pPr marL="3886200" indent="-228600" algn="l" defTabSz="914400" rtl="0" eaLnBrk="1" latinLnBrk="0" hangingPunct="1">
+      <a:lvl9pPr marL="5181470" indent="-304792" algn="l" defTabSz="1219170" rtl="0" eaLnBrk="1" latinLnBrk="0" hangingPunct="1">
         <a:spcBef>
           <a:spcPct val="20000"/>
         </a:spcBef>
-        <a:buFont typeface="Arial" pitchFamily="34" charset="0"/>
+        <a:buFont typeface="Arial" panose="02080604020202020204" pitchFamily="34" charset="0"/>
         <a:buChar char="•"/>
-        <a:defRPr sz="2000" kern="1200">
+        <a:defRPr sz="2667" kern="1200">
           <a:solidFill>
             <a:schemeClr val="tx1"/>
           </a:solidFill>
@@ -2937,10 +3010,10 @@
     </p:bodyStyle>
     <p:otherStyle>
       <a:defPPr>
-        <a:defRPr lang="en-US"/>
+        <a:defRPr lang="zh-TW"/>
       </a:defPPr>
-      <a:lvl1pPr marL="0" algn="l" defTabSz="914400" rtl="0" eaLnBrk="1" latinLnBrk="0" hangingPunct="1">
-        <a:defRPr sz="1800" kern="1200">
+      <a:lvl1pPr marL="0" algn="l" defTabSz="1219170" rtl="0" eaLnBrk="1" latinLnBrk="0" hangingPunct="1">
+        <a:defRPr sz="2400" kern="1200">
           <a:solidFill>
             <a:schemeClr val="tx1"/>
           </a:solidFill>
@@ -2949,8 +3022,8 @@
           <a:cs typeface="+mn-cs"/>
         </a:defRPr>
       </a:lvl1pPr>
-      <a:lvl2pPr marL="457200" algn="l" defTabSz="914400" rtl="0" eaLnBrk="1" latinLnBrk="0" hangingPunct="1">
-        <a:defRPr sz="1800" kern="1200">
+      <a:lvl2pPr marL="609585" algn="l" defTabSz="1219170" rtl="0" eaLnBrk="1" latinLnBrk="0" hangingPunct="1">
+        <a:defRPr sz="2400" kern="1200">
           <a:solidFill>
             <a:schemeClr val="tx1"/>
           </a:solidFill>
@@ -2959,8 +3032,8 @@
           <a:cs typeface="+mn-cs"/>
         </a:defRPr>
       </a:lvl2pPr>
-      <a:lvl3pPr marL="914400" algn="l" defTabSz="914400" rtl="0" eaLnBrk="1" latinLnBrk="0" hangingPunct="1">
-        <a:defRPr sz="1800" kern="1200">
+      <a:lvl3pPr marL="1219170" algn="l" defTabSz="1219170" rtl="0" eaLnBrk="1" latinLnBrk="0" hangingPunct="1">
+        <a:defRPr sz="2400" kern="1200">
           <a:solidFill>
             <a:schemeClr val="tx1"/>
           </a:solidFill>
@@ -2969,8 +3042,8 @@
           <a:cs typeface="+mn-cs"/>
         </a:defRPr>
       </a:lvl3pPr>
-      <a:lvl4pPr marL="1371600" algn="l" defTabSz="914400" rtl="0" eaLnBrk="1" latinLnBrk="0" hangingPunct="1">
-        <a:defRPr sz="1800" kern="1200">
+      <a:lvl4pPr marL="1828754" algn="l" defTabSz="1219170" rtl="0" eaLnBrk="1" latinLnBrk="0" hangingPunct="1">
+        <a:defRPr sz="2400" kern="1200">
           <a:solidFill>
             <a:schemeClr val="tx1"/>
           </a:solidFill>
@@ -2979,8 +3052,8 @@
           <a:cs typeface="+mn-cs"/>
         </a:defRPr>
       </a:lvl4pPr>
-      <a:lvl5pPr marL="1828800" algn="l" defTabSz="914400" rtl="0" eaLnBrk="1" latinLnBrk="0" hangingPunct="1">
-        <a:defRPr sz="1800" kern="1200">
+      <a:lvl5pPr marL="2438339" algn="l" defTabSz="1219170" rtl="0" eaLnBrk="1" latinLnBrk="0" hangingPunct="1">
+        <a:defRPr sz="2400" kern="1200">
           <a:solidFill>
             <a:schemeClr val="tx1"/>
           </a:solidFill>
@@ -2989,8 +3062,8 @@
           <a:cs typeface="+mn-cs"/>
         </a:defRPr>
       </a:lvl5pPr>
-      <a:lvl6pPr marL="2286000" algn="l" defTabSz="914400" rtl="0" eaLnBrk="1" latinLnBrk="0" hangingPunct="1">
-        <a:defRPr sz="1800" kern="1200">
+      <a:lvl6pPr marL="3047924" algn="l" defTabSz="1219170" rtl="0" eaLnBrk="1" latinLnBrk="0" hangingPunct="1">
+        <a:defRPr sz="2400" kern="1200">
           <a:solidFill>
             <a:schemeClr val="tx1"/>
           </a:solidFill>
@@ -2999,8 +3072,8 @@
           <a:cs typeface="+mn-cs"/>
         </a:defRPr>
       </a:lvl6pPr>
-      <a:lvl7pPr marL="2743200" algn="l" defTabSz="914400" rtl="0" eaLnBrk="1" latinLnBrk="0" hangingPunct="1">
-        <a:defRPr sz="1800" kern="1200">
+      <a:lvl7pPr marL="3657509" algn="l" defTabSz="1219170" rtl="0" eaLnBrk="1" latinLnBrk="0" hangingPunct="1">
+        <a:defRPr sz="2400" kern="1200">
           <a:solidFill>
             <a:schemeClr val="tx1"/>
           </a:solidFill>
@@ -3009,8 +3082,8 @@
           <a:cs typeface="+mn-cs"/>
         </a:defRPr>
       </a:lvl7pPr>
-      <a:lvl8pPr marL="3200400" algn="l" defTabSz="914400" rtl="0" eaLnBrk="1" latinLnBrk="0" hangingPunct="1">
-        <a:defRPr sz="1800" kern="1200">
+      <a:lvl8pPr marL="4267093" algn="l" defTabSz="1219170" rtl="0" eaLnBrk="1" latinLnBrk="0" hangingPunct="1">
+        <a:defRPr sz="2400" kern="1200">
           <a:solidFill>
             <a:schemeClr val="tx1"/>
           </a:solidFill>
@@ -3019,8 +3092,8 @@
           <a:cs typeface="+mn-cs"/>
         </a:defRPr>
       </a:lvl8pPr>
-      <a:lvl9pPr marL="3657600" algn="l" defTabSz="914400" rtl="0" eaLnBrk="1" latinLnBrk="0" hangingPunct="1">
-        <a:defRPr sz="1800" kern="1200">
+      <a:lvl9pPr marL="4876678" algn="l" defTabSz="1219170" rtl="0" eaLnBrk="1" latinLnBrk="0" hangingPunct="1">
+        <a:defRPr sz="2400" kern="1200">
           <a:solidFill>
             <a:schemeClr val="tx1"/>
           </a:solidFill>
@@ -3061,64 +3134,35 @@
             <p:ph type="title"/>
           </p:nvPr>
         </p:nvSpPr>
-        <p:spPr/>
-        <p:txBody>
-          <a:bodyPr/>
-          <a:lstStyle/>
-          <a:p>
-            <a:r>
-              <a:rPr lang="zh-CN" altLang="en-US" dirty="0" smtClean="0"/>
+        <p:spPr>
+          <a:xfrm>
+            <a:off x="0" y="2660915"/>
+            <a:ext cx="12192000" cy="1143000"/>
+          </a:xfrm>
+        </p:spPr>
+        <p:txBody>
+          <a:bodyPr>
+            <a:noAutofit/>
+          </a:bodyPr>
+          <a:lstStyle/>
+          <a:p>
+            <a:r>
+              <a:rPr lang="zh-TW" altLang="en-US" sz="7200" b="1" i="1" dirty="0">
+                <a:solidFill>
+                  <a:srgbClr val="660033"/>
+                </a:solidFill>
+                <a:effectLst>
+                  <a:outerShdw blurRad="38100" dist="38100" dir="2700000" algn="tl">
+                    <a:srgbClr val="000000">
+                      <a:alpha val="43137"/>
+                    </a:srgbClr>
+                  </a:outerShdw>
+                </a:effectLst>
+                <a:latin typeface="微軟正黑體" pitchFamily="34" charset="-120"/>
+                <a:ea typeface="微軟正黑體" pitchFamily="34" charset="-120"/>
+              </a:rPr>
               <a:t>快樂人</a:t>
             </a:r>
-            <a:endParaRPr lang="zh-TW" altLang="en-US" dirty="0"/>
-          </a:p>
-        </p:txBody>
-      </p:sp>
-      <p:sp>
-        <p:nvSpPr>
-          <p:cNvPr id="5" name="內容版面配置區 4"/>
-          <p:cNvSpPr>
-            <a:spLocks noGrp="1"/>
-          </p:cNvSpPr>
-          <p:nvPr>
-            <p:ph idx="1"/>
-          </p:nvPr>
-        </p:nvSpPr>
-        <p:spPr/>
-        <p:txBody>
-          <a:bodyPr>
-            <a:normAutofit/>
-          </a:bodyPr>
-          <a:lstStyle/>
-          <a:p>
-            <a:pPr algn="ctr">
-              <a:buNone/>
-            </a:pPr>
-            <a:r>
-              <a:rPr lang="zh-CN" altLang="en-US" sz="5400" dirty="0" smtClean="0"/>
-              <a:t>真開心早經已獲得拯救</a:t>
-            </a:r>
-            <a:endParaRPr lang="en-US" altLang="zh-CN" sz="5400" dirty="0" smtClean="0"/>
-          </a:p>
-          <a:p>
-            <a:pPr algn="ctr">
-              <a:buNone/>
-            </a:pPr>
-            <a:r>
-              <a:rPr lang="zh-CN" altLang="en-US" sz="5400" dirty="0" smtClean="0"/>
-              <a:t>得恩主愛護能做快樂人</a:t>
-            </a:r>
-            <a:endParaRPr lang="en-US" altLang="zh-CN" sz="5400" dirty="0" smtClean="0"/>
-          </a:p>
-          <a:p>
-            <a:pPr algn="ctr">
-              <a:buNone/>
-            </a:pPr>
-            <a:r>
-              <a:rPr lang="zh-CN" altLang="en-US" sz="5400" dirty="0" smtClean="0"/>
-              <a:t>神常維護我心中倍歡欣</a:t>
-            </a:r>
-            <a:endParaRPr lang="zh-TW" altLang="en-US" sz="5400" dirty="0"/>
           </a:p>
         </p:txBody>
       </p:sp>
@@ -3149,29 +3193,6 @@
       </p:grpSpPr>
       <p:sp>
         <p:nvSpPr>
-          <p:cNvPr id="4" name="標題 3"/>
-          <p:cNvSpPr>
-            <a:spLocks noGrp="1"/>
-          </p:cNvSpPr>
-          <p:nvPr>
-            <p:ph type="title"/>
-          </p:nvPr>
-        </p:nvSpPr>
-        <p:spPr/>
-        <p:txBody>
-          <a:bodyPr/>
-          <a:lstStyle/>
-          <a:p>
-            <a:r>
-              <a:rPr lang="zh-CN" altLang="en-US" dirty="0" smtClean="0"/>
-              <a:t>快樂人</a:t>
-            </a:r>
-            <a:endParaRPr lang="zh-TW" altLang="en-US" dirty="0"/>
-          </a:p>
-        </p:txBody>
-      </p:sp>
-      <p:sp>
-        <p:nvSpPr>
           <p:cNvPr id="5" name="內容版面配置區 4"/>
           <p:cNvSpPr>
             <a:spLocks noGrp="1"/>
@@ -3180,9 +3201,14 @@
             <p:ph idx="1"/>
           </p:nvPr>
         </p:nvSpPr>
-        <p:spPr/>
-        <p:txBody>
-          <a:bodyPr>
+        <p:spPr>
+          <a:xfrm>
+            <a:off x="0" y="2084851"/>
+            <a:ext cx="12192000" cy="2404863"/>
+          </a:xfrm>
+        </p:spPr>
+        <p:txBody>
+          <a:bodyPr anchor="ctr">
             <a:normAutofit/>
           </a:bodyPr>
           <a:lstStyle/>
@@ -3191,30 +3217,93 @@
               <a:buNone/>
             </a:pPr>
             <a:r>
-              <a:rPr lang="zh-CN" altLang="en-US" sz="5400" dirty="0" smtClean="0"/>
-              <a:t>人生滿希望共主可以同行</a:t>
-            </a:r>
-            <a:endParaRPr lang="en-US" altLang="zh-CN" sz="5400" dirty="0" smtClean="0"/>
+              <a:rPr lang="zh-TW" altLang="en-US" sz="6400" b="1" dirty="0">
+                <a:solidFill>
+                  <a:srgbClr val="660033"/>
+                </a:solidFill>
+                <a:latin typeface="微軟正黑體" pitchFamily="34" charset="-120"/>
+                <a:ea typeface="微軟正黑體" pitchFamily="34" charset="-120"/>
+              </a:rPr>
+              <a:t>真開心早經已獲得拯救</a:t>
+            </a:r>
           </a:p>
           <a:p>
             <a:pPr algn="ctr">
               <a:buNone/>
             </a:pPr>
             <a:r>
-              <a:rPr lang="zh-CN" altLang="en-US" sz="5400" dirty="0" smtClean="0"/>
-              <a:t>我願以歌聲  唱頌救主恩</a:t>
-            </a:r>
-            <a:endParaRPr lang="en-US" altLang="zh-CN" sz="5400" dirty="0" smtClean="0"/>
-          </a:p>
-          <a:p>
-            <a:pPr algn="ctr">
-              <a:buNone/>
-            </a:pPr>
-            <a:r>
-              <a:rPr lang="zh-CN" altLang="en-US" sz="5400" dirty="0" smtClean="0"/>
-              <a:t>常頌揚基督感激祂護蔭</a:t>
-            </a:r>
-            <a:endParaRPr lang="zh-TW" altLang="en-US" sz="5400" dirty="0"/>
+              <a:rPr lang="zh-TW" altLang="en-US" sz="6400" b="1" dirty="0">
+                <a:solidFill>
+                  <a:srgbClr val="660033"/>
+                </a:solidFill>
+                <a:latin typeface="微軟正黑體" pitchFamily="34" charset="-120"/>
+                <a:ea typeface="微軟正黑體" pitchFamily="34" charset="-120"/>
+              </a:rPr>
+              <a:t>得恩主愛護能做快樂人</a:t>
+            </a:r>
+          </a:p>
+        </p:txBody>
+      </p:sp>
+      <p:sp>
+        <p:nvSpPr>
+          <p:cNvPr id="3" name="TextBox 2"/>
+          <p:cNvSpPr txBox="1"/>
+          <p:nvPr/>
+        </p:nvSpPr>
+        <p:spPr>
+          <a:xfrm>
+            <a:off x="0" y="5157193"/>
+            <a:ext cx="12192000" cy="584775"/>
+          </a:xfrm>
+          <a:prstGeom prst="rect">
+            <a:avLst/>
+          </a:prstGeom>
+          <a:noFill/>
+        </p:spPr>
+        <p:txBody>
+          <a:bodyPr wrap="square" rtlCol="0">
+            <a:spAutoFit/>
+          </a:bodyPr>
+          <a:lstStyle/>
+          <a:p>
+            <a:pPr algn="ctr"/>
+            <a:r>
+              <a:rPr lang="en-US" sz="3200" b="1" dirty="0">
+                <a:solidFill>
+                  <a:srgbClr val="660033"/>
+                </a:solidFill>
+                <a:latin typeface="+mj-lt"/>
+                <a:ea typeface="Microsoft JhengHei" panose="020B0604030504040204" pitchFamily="34" charset="-120"/>
+              </a:rPr>
+              <a:t>( </a:t>
+            </a:r>
+            <a:r>
+              <a:rPr lang="en-US" altLang="zh-CN" sz="3200" b="1" dirty="0">
+                <a:solidFill>
+                  <a:srgbClr val="660033"/>
+                </a:solidFill>
+                <a:latin typeface="+mj-lt"/>
+                <a:ea typeface="Microsoft JhengHei" panose="020B0604030504040204" pitchFamily="34" charset="-120"/>
+              </a:rPr>
+              <a:t>1 / 2</a:t>
+            </a:r>
+            <a:r>
+              <a:rPr lang="en-US" sz="3200" b="1" dirty="0">
+                <a:solidFill>
+                  <a:srgbClr val="660033"/>
+                </a:solidFill>
+                <a:latin typeface="+mj-lt"/>
+                <a:ea typeface="Microsoft JhengHei" panose="020B0604030504040204" pitchFamily="34" charset="-120"/>
+              </a:rPr>
+              <a:t> )</a:t>
+            </a:r>
+            <a:endParaRPr lang="vi-VN" sz="3200" b="1" dirty="0">
+              <a:solidFill>
+                <a:srgbClr val="660033"/>
+              </a:solidFill>
+              <a:latin typeface="+mj-lt"/>
+              <a:ea typeface="Microsoft JhengHei" panose="020B0604030504040204" pitchFamily="34" charset="-120"/>
+            </a:endParaRPr>
           </a:p>
         </p:txBody>
       </p:sp>
@@ -3231,7 +3320,13 @@
   <p:cSld>
     <p:spTree>
       <p:nvGrpSpPr>
-        <p:cNvPr id="1" name=""/>
+        <p:cNvPr id="1" name="">
+          <a:extLst>
+            <a:ext uri="{FF2B5EF4-FFF2-40B4-BE49-F238E27FC236}">
+              <a16:creationId xmlns:a16="http://schemas.microsoft.com/office/drawing/2014/main" id="{72E75266-E13D-F3C2-518B-480D5A5FB8B2}"/>
+            </a:ext>
+          </a:extLst>
+        </p:cNvPr>
         <p:cNvGrpSpPr/>
         <p:nvPr/>
       </p:nvGrpSpPr>
@@ -3245,30 +3340,13 @@
       </p:grpSpPr>
       <p:sp>
         <p:nvSpPr>
-          <p:cNvPr id="4" name="標題 3"/>
-          <p:cNvSpPr>
-            <a:spLocks noGrp="1"/>
-          </p:cNvSpPr>
-          <p:nvPr>
-            <p:ph type="title"/>
-          </p:nvPr>
-        </p:nvSpPr>
-        <p:spPr/>
-        <p:txBody>
-          <a:bodyPr/>
-          <a:lstStyle/>
-          <a:p>
-            <a:r>
-              <a:rPr lang="zh-CN" altLang="en-US" dirty="0" smtClean="0"/>
-              <a:t>快樂人</a:t>
-            </a:r>
-            <a:endParaRPr lang="zh-TW" altLang="en-US" dirty="0"/>
-          </a:p>
-        </p:txBody>
-      </p:sp>
-      <p:sp>
-        <p:nvSpPr>
-          <p:cNvPr id="5" name="內容版面配置區 4"/>
+          <p:cNvPr id="5" name="內容版面配置區 4">
+            <a:extLst>
+              <a:ext uri="{FF2B5EF4-FFF2-40B4-BE49-F238E27FC236}">
+                <a16:creationId xmlns:a16="http://schemas.microsoft.com/office/drawing/2014/main" id="{072F1120-9ED7-D79C-2943-758B4585B50B}"/>
+              </a:ext>
+            </a:extLst>
+          </p:cNvPr>
           <p:cNvSpPr>
             <a:spLocks noGrp="1"/>
           </p:cNvSpPr>
@@ -3276,9 +3354,14 @@
             <p:ph idx="1"/>
           </p:nvPr>
         </p:nvSpPr>
-        <p:spPr/>
-        <p:txBody>
-          <a:bodyPr>
+        <p:spPr>
+          <a:xfrm>
+            <a:off x="0" y="2084851"/>
+            <a:ext cx="12192000" cy="2404863"/>
+          </a:xfrm>
+        </p:spPr>
+        <p:txBody>
+          <a:bodyPr anchor="ctr">
             <a:normAutofit/>
           </a:bodyPr>
           <a:lstStyle/>
@@ -3287,38 +3370,115 @@
               <a:buNone/>
             </a:pPr>
             <a:r>
-              <a:rPr lang="zh-CN" altLang="en-US" sz="5400" dirty="0" smtClean="0"/>
-              <a:t>心中真興奮有上主同行</a:t>
-            </a:r>
-            <a:endParaRPr lang="en-US" altLang="zh-CN" sz="5400" dirty="0" smtClean="0"/>
+              <a:rPr lang="zh-TW" altLang="en-US" sz="6400" b="1" dirty="0">
+                <a:solidFill>
+                  <a:srgbClr val="660033"/>
+                </a:solidFill>
+                <a:latin typeface="微軟正黑體" pitchFamily="34" charset="-120"/>
+                <a:ea typeface="微軟正黑體" pitchFamily="34" charset="-120"/>
+              </a:rPr>
+              <a:t>神常維護我心中倍歡欣</a:t>
+            </a:r>
+            <a:endParaRPr lang="en-US" altLang="zh-TW" sz="6400" b="1" dirty="0">
+              <a:solidFill>
+                <a:srgbClr val="660033"/>
+              </a:solidFill>
+              <a:latin typeface="微軟正黑體" pitchFamily="34" charset="-120"/>
+              <a:ea typeface="微軟正黑體" pitchFamily="34" charset="-120"/>
+            </a:endParaRPr>
           </a:p>
           <a:p>
             <a:pPr algn="ctr">
               <a:buNone/>
             </a:pPr>
             <a:r>
-              <a:rPr lang="zh-CN" altLang="en-US" sz="5400" dirty="0" smtClean="0"/>
-              <a:t>基督親領路全力向前行</a:t>
-            </a:r>
-            <a:endParaRPr lang="en-US" altLang="zh-CN" sz="5400" dirty="0" smtClean="0"/>
-          </a:p>
-          <a:p>
-            <a:pPr algn="ctr">
-              <a:buNone/>
-            </a:pPr>
-            <a:r>
-              <a:rPr lang="zh-CN" altLang="en-US" sz="5400" dirty="0"/>
-              <a:t>全</a:t>
-            </a:r>
-            <a:r>
-              <a:rPr lang="zh-CN" altLang="en-US" sz="5400" dirty="0" smtClean="0"/>
-              <a:t>無後顧之憂更安心</a:t>
-            </a:r>
-            <a:endParaRPr lang="zh-TW" altLang="en-US" sz="5400" dirty="0"/>
+              <a:rPr lang="zh-TW" altLang="en-US" sz="6400" b="1" dirty="0">
+                <a:solidFill>
+                  <a:srgbClr val="660033"/>
+                </a:solidFill>
+                <a:latin typeface="微軟正黑體" pitchFamily="34" charset="-120"/>
+                <a:ea typeface="微軟正黑體" pitchFamily="34" charset="-120"/>
+              </a:rPr>
+              <a:t>人生滿希望共主可以同行</a:t>
+            </a:r>
+          </a:p>
+        </p:txBody>
+      </p:sp>
+      <p:sp>
+        <p:nvSpPr>
+          <p:cNvPr id="3" name="TextBox 2">
+            <a:extLst>
+              <a:ext uri="{FF2B5EF4-FFF2-40B4-BE49-F238E27FC236}">
+                <a16:creationId xmlns:a16="http://schemas.microsoft.com/office/drawing/2014/main" id="{B4610085-6DF7-6445-3E1A-6D8F242FABBE}"/>
+              </a:ext>
+            </a:extLst>
+          </p:cNvPr>
+          <p:cNvSpPr txBox="1"/>
+          <p:nvPr/>
+        </p:nvSpPr>
+        <p:spPr>
+          <a:xfrm>
+            <a:off x="0" y="5157193"/>
+            <a:ext cx="12192000" cy="584775"/>
+          </a:xfrm>
+          <a:prstGeom prst="rect">
+            <a:avLst/>
+          </a:prstGeom>
+          <a:noFill/>
+        </p:spPr>
+        <p:txBody>
+          <a:bodyPr wrap="square" rtlCol="0">
+            <a:spAutoFit/>
+          </a:bodyPr>
+          <a:lstStyle/>
+          <a:p>
+            <a:pPr algn="ctr"/>
+            <a:r>
+              <a:rPr lang="en-US" sz="3200" b="1" dirty="0">
+                <a:solidFill>
+                  <a:srgbClr val="660033"/>
+                </a:solidFill>
+                <a:latin typeface="+mj-lt"/>
+                <a:ea typeface="Microsoft JhengHei" panose="020B0604030504040204" pitchFamily="34" charset="-120"/>
+              </a:rPr>
+              <a:t>( </a:t>
+            </a:r>
+            <a:r>
+              <a:rPr lang="en-US" altLang="zh-CN" sz="3200" b="1" dirty="0">
+                <a:solidFill>
+                  <a:srgbClr val="660033"/>
+                </a:solidFill>
+                <a:latin typeface="+mj-lt"/>
+                <a:ea typeface="Microsoft JhengHei" panose="020B0604030504040204" pitchFamily="34" charset="-120"/>
+              </a:rPr>
+              <a:t>1 / 2</a:t>
+            </a:r>
+            <a:r>
+              <a:rPr lang="en-US" sz="3200" b="1" dirty="0">
+                <a:solidFill>
+                  <a:srgbClr val="660033"/>
+                </a:solidFill>
+                <a:latin typeface="+mj-lt"/>
+                <a:ea typeface="Microsoft JhengHei" panose="020B0604030504040204" pitchFamily="34" charset="-120"/>
+              </a:rPr>
+              <a:t> )</a:t>
+            </a:r>
+            <a:endParaRPr lang="vi-VN" sz="3200" b="1" dirty="0">
+              <a:solidFill>
+                <a:srgbClr val="660033"/>
+              </a:solidFill>
+              <a:latin typeface="+mj-lt"/>
+              <a:ea typeface="Microsoft JhengHei" panose="020B0604030504040204" pitchFamily="34" charset="-120"/>
+            </a:endParaRPr>
           </a:p>
         </p:txBody>
       </p:sp>
     </p:spTree>
+    <p:extLst>
+      <p:ext uri="{BB962C8B-B14F-4D97-AF65-F5344CB8AC3E}">
+        <p14:creationId xmlns:p14="http://schemas.microsoft.com/office/powerpoint/2010/main" val="1704389770"/>
+      </p:ext>
+    </p:extLst>
   </p:cSld>
   <p:clrMapOvr>
     <a:masterClrMapping/>
@@ -3331,7 +3491,13 @@
   <p:cSld>
     <p:spTree>
       <p:nvGrpSpPr>
-        <p:cNvPr id="1" name=""/>
+        <p:cNvPr id="1" name="">
+          <a:extLst>
+            <a:ext uri="{FF2B5EF4-FFF2-40B4-BE49-F238E27FC236}">
+              <a16:creationId xmlns:a16="http://schemas.microsoft.com/office/drawing/2014/main" id="{95880F7A-B055-5DC3-BE55-AFBE02A7CCFE}"/>
+            </a:ext>
+          </a:extLst>
+        </p:cNvPr>
         <p:cNvGrpSpPr/>
         <p:nvPr/>
       </p:nvGrpSpPr>
@@ -3345,30 +3511,13 @@
       </p:grpSpPr>
       <p:sp>
         <p:nvSpPr>
-          <p:cNvPr id="4" name="標題 3"/>
-          <p:cNvSpPr>
-            <a:spLocks noGrp="1"/>
-          </p:cNvSpPr>
-          <p:nvPr>
-            <p:ph type="title"/>
-          </p:nvPr>
-        </p:nvSpPr>
-        <p:spPr/>
-        <p:txBody>
-          <a:bodyPr/>
-          <a:lstStyle/>
-          <a:p>
-            <a:r>
-              <a:rPr lang="zh-CN" altLang="en-US" dirty="0" smtClean="0"/>
-              <a:t>快樂人</a:t>
-            </a:r>
-            <a:endParaRPr lang="zh-TW" altLang="en-US" dirty="0"/>
-          </a:p>
-        </p:txBody>
-      </p:sp>
-      <p:sp>
-        <p:nvSpPr>
-          <p:cNvPr id="5" name="內容版面配置區 4"/>
+          <p:cNvPr id="5" name="內容版面配置區 4">
+            <a:extLst>
+              <a:ext uri="{FF2B5EF4-FFF2-40B4-BE49-F238E27FC236}">
+                <a16:creationId xmlns:a16="http://schemas.microsoft.com/office/drawing/2014/main" id="{CA9E3327-9081-52AF-ED51-764E35922649}"/>
+              </a:ext>
+            </a:extLst>
+          </p:cNvPr>
           <p:cNvSpPr>
             <a:spLocks noGrp="1"/>
           </p:cNvSpPr>
@@ -3376,9 +3525,14 @@
             <p:ph idx="1"/>
           </p:nvPr>
         </p:nvSpPr>
-        <p:spPr/>
-        <p:txBody>
-          <a:bodyPr>
+        <p:spPr>
+          <a:xfrm>
+            <a:off x="0" y="2084851"/>
+            <a:ext cx="12192000" cy="2404863"/>
+          </a:xfrm>
+        </p:spPr>
+        <p:txBody>
+          <a:bodyPr anchor="ctr">
             <a:normAutofit/>
           </a:bodyPr>
           <a:lstStyle/>
@@ -3387,34 +3541,621 @@
               <a:buNone/>
             </a:pPr>
             <a:r>
-              <a:rPr lang="zh-CN" altLang="en-US" sz="5400" dirty="0" smtClean="0"/>
+              <a:rPr lang="zh-TW" altLang="en-US" sz="6400" b="1" dirty="0">
+                <a:solidFill>
+                  <a:srgbClr val="660033"/>
+                </a:solidFill>
+                <a:latin typeface="微軟正黑體" pitchFamily="34" charset="-120"/>
+                <a:ea typeface="微軟正黑體" pitchFamily="34" charset="-120"/>
+              </a:rPr>
+              <a:t>我願以歌聲  唱頌救主恩</a:t>
+            </a:r>
+            <a:endParaRPr lang="en-US" altLang="zh-TW" sz="6400" b="1" dirty="0">
+              <a:solidFill>
+                <a:srgbClr val="660033"/>
+              </a:solidFill>
+              <a:latin typeface="微軟正黑體" pitchFamily="34" charset="-120"/>
+              <a:ea typeface="微軟正黑體" pitchFamily="34" charset="-120"/>
+            </a:endParaRPr>
+          </a:p>
+          <a:p>
+            <a:pPr algn="ctr">
+              <a:buNone/>
+            </a:pPr>
+            <a:r>
+              <a:rPr lang="zh-TW" altLang="en-US" sz="6400" b="1" dirty="0">
+                <a:solidFill>
+                  <a:srgbClr val="660033"/>
+                </a:solidFill>
+                <a:latin typeface="微軟正黑體" pitchFamily="34" charset="-120"/>
+                <a:ea typeface="微軟正黑體" pitchFamily="34" charset="-120"/>
+              </a:rPr>
+              <a:t>常頌揚基督感激祂護蔭</a:t>
+            </a:r>
+          </a:p>
+        </p:txBody>
+      </p:sp>
+      <p:sp>
+        <p:nvSpPr>
+          <p:cNvPr id="3" name="TextBox 2">
+            <a:extLst>
+              <a:ext uri="{FF2B5EF4-FFF2-40B4-BE49-F238E27FC236}">
+                <a16:creationId xmlns:a16="http://schemas.microsoft.com/office/drawing/2014/main" id="{34198B32-7973-36E8-04D4-C65E0D33D9D2}"/>
+              </a:ext>
+            </a:extLst>
+          </p:cNvPr>
+          <p:cNvSpPr txBox="1"/>
+          <p:nvPr/>
+        </p:nvSpPr>
+        <p:spPr>
+          <a:xfrm>
+            <a:off x="0" y="5157193"/>
+            <a:ext cx="12192000" cy="584775"/>
+          </a:xfrm>
+          <a:prstGeom prst="rect">
+            <a:avLst/>
+          </a:prstGeom>
+          <a:noFill/>
+        </p:spPr>
+        <p:txBody>
+          <a:bodyPr wrap="square" rtlCol="0">
+            <a:spAutoFit/>
+          </a:bodyPr>
+          <a:lstStyle/>
+          <a:p>
+            <a:pPr algn="ctr"/>
+            <a:r>
+              <a:rPr lang="en-US" sz="3200" b="1" dirty="0">
+                <a:solidFill>
+                  <a:srgbClr val="660033"/>
+                </a:solidFill>
+                <a:latin typeface="+mj-lt"/>
+                <a:ea typeface="Microsoft JhengHei" panose="020B0604030504040204" pitchFamily="34" charset="-120"/>
+              </a:rPr>
+              <a:t>( </a:t>
+            </a:r>
+            <a:r>
+              <a:rPr lang="en-US" altLang="zh-CN" sz="3200" b="1" dirty="0">
+                <a:solidFill>
+                  <a:srgbClr val="660033"/>
+                </a:solidFill>
+                <a:latin typeface="+mj-lt"/>
+                <a:ea typeface="Microsoft JhengHei" panose="020B0604030504040204" pitchFamily="34" charset="-120"/>
+              </a:rPr>
+              <a:t>1 / 2</a:t>
+            </a:r>
+            <a:r>
+              <a:rPr lang="en-US" sz="3200" b="1" dirty="0">
+                <a:solidFill>
+                  <a:srgbClr val="660033"/>
+                </a:solidFill>
+                <a:latin typeface="+mj-lt"/>
+                <a:ea typeface="Microsoft JhengHei" panose="020B0604030504040204" pitchFamily="34" charset="-120"/>
+              </a:rPr>
+              <a:t> )</a:t>
+            </a:r>
+            <a:endParaRPr lang="vi-VN" sz="3200" b="1" dirty="0">
+              <a:solidFill>
+                <a:srgbClr val="660033"/>
+              </a:solidFill>
+              <a:latin typeface="+mj-lt"/>
+              <a:ea typeface="Microsoft JhengHei" panose="020B0604030504040204" pitchFamily="34" charset="-120"/>
+            </a:endParaRPr>
+          </a:p>
+        </p:txBody>
+      </p:sp>
+    </p:spTree>
+    <p:extLst>
+      <p:ext uri="{BB962C8B-B14F-4D97-AF65-F5344CB8AC3E}">
+        <p14:creationId xmlns:p14="http://schemas.microsoft.com/office/powerpoint/2010/main" val="2849162490"/>
+      </p:ext>
+    </p:extLst>
+  </p:cSld>
+  <p:clrMapOvr>
+    <a:masterClrMapping/>
+  </p:clrMapOvr>
+</p:sld>
+</file>
+
+<file path=ppt/slides/slide5.xml><?xml version="1.0" encoding="utf-8"?>
+<p:sld xmlns:a="http://schemas.openxmlformats.org/drawingml/2006/main" xmlns:r="http://schemas.openxmlformats.org/officeDocument/2006/relationships" xmlns:p="http://schemas.openxmlformats.org/presentationml/2006/main">
+  <p:cSld>
+    <p:spTree>
+      <p:nvGrpSpPr>
+        <p:cNvPr id="1" name="">
+          <a:extLst>
+            <a:ext uri="{FF2B5EF4-FFF2-40B4-BE49-F238E27FC236}">
+              <a16:creationId xmlns:a16="http://schemas.microsoft.com/office/drawing/2014/main" id="{05D296F6-94F1-954F-15F8-2DDC003F2DF7}"/>
+            </a:ext>
+          </a:extLst>
+        </p:cNvPr>
+        <p:cNvGrpSpPr/>
+        <p:nvPr/>
+      </p:nvGrpSpPr>
+      <p:grpSpPr>
+        <a:xfrm>
+          <a:off x="0" y="0"/>
+          <a:ext cx="0" cy="0"/>
+          <a:chOff x="0" y="0"/>
+          <a:chExt cx="0" cy="0"/>
+        </a:xfrm>
+      </p:grpSpPr>
+      <p:sp>
+        <p:nvSpPr>
+          <p:cNvPr id="5" name="內容版面配置區 4">
+            <a:extLst>
+              <a:ext uri="{FF2B5EF4-FFF2-40B4-BE49-F238E27FC236}">
+                <a16:creationId xmlns:a16="http://schemas.microsoft.com/office/drawing/2014/main" id="{5E02C702-5220-1729-B707-B7FFCCEED6A2}"/>
+              </a:ext>
+            </a:extLst>
+          </p:cNvPr>
+          <p:cNvSpPr>
+            <a:spLocks noGrp="1"/>
+          </p:cNvSpPr>
+          <p:nvPr>
+            <p:ph idx="1"/>
+          </p:nvPr>
+        </p:nvSpPr>
+        <p:spPr>
+          <a:xfrm>
+            <a:off x="0" y="2084851"/>
+            <a:ext cx="12192000" cy="2404863"/>
+          </a:xfrm>
+        </p:spPr>
+        <p:txBody>
+          <a:bodyPr anchor="ctr">
+            <a:normAutofit/>
+          </a:bodyPr>
+          <a:lstStyle/>
+          <a:p>
+            <a:pPr algn="ctr">
+              <a:buNone/>
+            </a:pPr>
+            <a:r>
+              <a:rPr lang="zh-TW" altLang="en-US" sz="6400" b="1" dirty="0">
+                <a:solidFill>
+                  <a:srgbClr val="660033"/>
+                </a:solidFill>
+                <a:latin typeface="微軟正黑體" pitchFamily="34" charset="-120"/>
+                <a:ea typeface="微軟正黑體" pitchFamily="34" charset="-120"/>
+              </a:rPr>
+              <a:t>心中真興奮有上主同行</a:t>
+            </a:r>
+          </a:p>
+          <a:p>
+            <a:pPr algn="ctr">
+              <a:buNone/>
+            </a:pPr>
+            <a:r>
+              <a:rPr lang="zh-TW" altLang="en-US" sz="6400" b="1" dirty="0">
+                <a:solidFill>
+                  <a:srgbClr val="660033"/>
+                </a:solidFill>
+                <a:latin typeface="微軟正黑體" pitchFamily="34" charset="-120"/>
+                <a:ea typeface="微軟正黑體" pitchFamily="34" charset="-120"/>
+              </a:rPr>
+              <a:t>基督親領路全力向前行</a:t>
+            </a:r>
+          </a:p>
+        </p:txBody>
+      </p:sp>
+      <p:sp>
+        <p:nvSpPr>
+          <p:cNvPr id="3" name="TextBox 2">
+            <a:extLst>
+              <a:ext uri="{FF2B5EF4-FFF2-40B4-BE49-F238E27FC236}">
+                <a16:creationId xmlns:a16="http://schemas.microsoft.com/office/drawing/2014/main" id="{5C0D1859-B43C-CE22-30F3-53058C6449A1}"/>
+              </a:ext>
+            </a:extLst>
+          </p:cNvPr>
+          <p:cNvSpPr txBox="1"/>
+          <p:nvPr/>
+        </p:nvSpPr>
+        <p:spPr>
+          <a:xfrm>
+            <a:off x="0" y="5157193"/>
+            <a:ext cx="12192000" cy="584775"/>
+          </a:xfrm>
+          <a:prstGeom prst="rect">
+            <a:avLst/>
+          </a:prstGeom>
+          <a:noFill/>
+        </p:spPr>
+        <p:txBody>
+          <a:bodyPr wrap="square" rtlCol="0">
+            <a:spAutoFit/>
+          </a:bodyPr>
+          <a:lstStyle/>
+          <a:p>
+            <a:pPr algn="ctr"/>
+            <a:r>
+              <a:rPr lang="en-US" sz="3200" b="1" dirty="0">
+                <a:solidFill>
+                  <a:srgbClr val="660033"/>
+                </a:solidFill>
+                <a:latin typeface="+mj-lt"/>
+                <a:ea typeface="Microsoft JhengHei" panose="020B0604030504040204" pitchFamily="34" charset="-120"/>
+              </a:rPr>
+              <a:t>( </a:t>
+            </a:r>
+            <a:r>
+              <a:rPr lang="en-US" altLang="zh-CN" sz="3200" b="1" dirty="0">
+                <a:solidFill>
+                  <a:srgbClr val="660033"/>
+                </a:solidFill>
+                <a:latin typeface="+mj-lt"/>
+                <a:ea typeface="Microsoft JhengHei" panose="020B0604030504040204" pitchFamily="34" charset="-120"/>
+              </a:rPr>
+              <a:t>2 / 2</a:t>
+            </a:r>
+            <a:r>
+              <a:rPr lang="en-US" sz="3200" b="1" dirty="0">
+                <a:solidFill>
+                  <a:srgbClr val="660033"/>
+                </a:solidFill>
+                <a:latin typeface="+mj-lt"/>
+                <a:ea typeface="Microsoft JhengHei" panose="020B0604030504040204" pitchFamily="34" charset="-120"/>
+              </a:rPr>
+              <a:t> )</a:t>
+            </a:r>
+            <a:endParaRPr lang="vi-VN" sz="3200" b="1" dirty="0">
+              <a:solidFill>
+                <a:srgbClr val="660033"/>
+              </a:solidFill>
+              <a:latin typeface="+mj-lt"/>
+              <a:ea typeface="Microsoft JhengHei" panose="020B0604030504040204" pitchFamily="34" charset="-120"/>
+            </a:endParaRPr>
+          </a:p>
+        </p:txBody>
+      </p:sp>
+    </p:spTree>
+    <p:extLst>
+      <p:ext uri="{BB962C8B-B14F-4D97-AF65-F5344CB8AC3E}">
+        <p14:creationId xmlns:p14="http://schemas.microsoft.com/office/powerpoint/2010/main" val="3635760248"/>
+      </p:ext>
+    </p:extLst>
+  </p:cSld>
+  <p:clrMapOvr>
+    <a:masterClrMapping/>
+  </p:clrMapOvr>
+</p:sld>
+</file>
+
+<file path=ppt/slides/slide6.xml><?xml version="1.0" encoding="utf-8"?>
+<p:sld xmlns:a="http://schemas.openxmlformats.org/drawingml/2006/main" xmlns:r="http://schemas.openxmlformats.org/officeDocument/2006/relationships" xmlns:p="http://schemas.openxmlformats.org/presentationml/2006/main">
+  <p:cSld>
+    <p:spTree>
+      <p:nvGrpSpPr>
+        <p:cNvPr id="1" name="">
+          <a:extLst>
+            <a:ext uri="{FF2B5EF4-FFF2-40B4-BE49-F238E27FC236}">
+              <a16:creationId xmlns:a16="http://schemas.microsoft.com/office/drawing/2014/main" id="{6040CB9C-6283-8E29-560D-456DEBFE8DF4}"/>
+            </a:ext>
+          </a:extLst>
+        </p:cNvPr>
+        <p:cNvGrpSpPr/>
+        <p:nvPr/>
+      </p:nvGrpSpPr>
+      <p:grpSpPr>
+        <a:xfrm>
+          <a:off x="0" y="0"/>
+          <a:ext cx="0" cy="0"/>
+          <a:chOff x="0" y="0"/>
+          <a:chExt cx="0" cy="0"/>
+        </a:xfrm>
+      </p:grpSpPr>
+      <p:sp>
+        <p:nvSpPr>
+          <p:cNvPr id="5" name="內容版面配置區 4">
+            <a:extLst>
+              <a:ext uri="{FF2B5EF4-FFF2-40B4-BE49-F238E27FC236}">
+                <a16:creationId xmlns:a16="http://schemas.microsoft.com/office/drawing/2014/main" id="{F321849C-3326-322C-E97E-073E3730F2E7}"/>
+              </a:ext>
+            </a:extLst>
+          </p:cNvPr>
+          <p:cNvSpPr>
+            <a:spLocks noGrp="1"/>
+          </p:cNvSpPr>
+          <p:nvPr>
+            <p:ph idx="1"/>
+          </p:nvPr>
+        </p:nvSpPr>
+        <p:spPr>
+          <a:xfrm>
+            <a:off x="0" y="2084851"/>
+            <a:ext cx="12192000" cy="2404863"/>
+          </a:xfrm>
+        </p:spPr>
+        <p:txBody>
+          <a:bodyPr anchor="ctr">
+            <a:normAutofit/>
+          </a:bodyPr>
+          <a:lstStyle/>
+          <a:p>
+            <a:pPr algn="ctr">
+              <a:buNone/>
+            </a:pPr>
+            <a:r>
+              <a:rPr lang="zh-TW" altLang="en-US" sz="6400" b="1" dirty="0">
+                <a:solidFill>
+                  <a:srgbClr val="660033"/>
+                </a:solidFill>
+                <a:latin typeface="微軟正黑體" pitchFamily="34" charset="-120"/>
+                <a:ea typeface="微軟正黑體" pitchFamily="34" charset="-120"/>
+              </a:rPr>
+              <a:t>全無後顧之憂更安心</a:t>
+            </a:r>
+            <a:endParaRPr lang="en-US" altLang="zh-TW" sz="6400" b="1" dirty="0">
+              <a:solidFill>
+                <a:srgbClr val="660033"/>
+              </a:solidFill>
+              <a:latin typeface="微軟正黑體" pitchFamily="34" charset="-120"/>
+              <a:ea typeface="微軟正黑體" pitchFamily="34" charset="-120"/>
+            </a:endParaRPr>
+          </a:p>
+          <a:p>
+            <a:pPr algn="ctr">
+              <a:buNone/>
+            </a:pPr>
+            <a:r>
+              <a:rPr lang="zh-TW" altLang="en-US" sz="6400" b="1" dirty="0">
+                <a:solidFill>
+                  <a:srgbClr val="660033"/>
+                </a:solidFill>
+                <a:latin typeface="微軟正黑體" pitchFamily="34" charset="-120"/>
+                <a:ea typeface="微軟正黑體" pitchFamily="34" charset="-120"/>
+              </a:rPr>
               <a:t>人生滿希望盡一生服事神</a:t>
             </a:r>
-            <a:endParaRPr lang="en-US" altLang="zh-CN" sz="5400" dirty="0" smtClean="0"/>
-          </a:p>
+          </a:p>
+        </p:txBody>
+      </p:sp>
+      <p:sp>
+        <p:nvSpPr>
+          <p:cNvPr id="3" name="TextBox 2">
+            <a:extLst>
+              <a:ext uri="{FF2B5EF4-FFF2-40B4-BE49-F238E27FC236}">
+                <a16:creationId xmlns:a16="http://schemas.microsoft.com/office/drawing/2014/main" id="{B75E7568-F097-FBBE-81A2-682855BF95B5}"/>
+              </a:ext>
+            </a:extLst>
+          </p:cNvPr>
+          <p:cNvSpPr txBox="1"/>
+          <p:nvPr/>
+        </p:nvSpPr>
+        <p:spPr>
+          <a:xfrm>
+            <a:off x="0" y="5157193"/>
+            <a:ext cx="12192000" cy="584775"/>
+          </a:xfrm>
+          <a:prstGeom prst="rect">
+            <a:avLst/>
+          </a:prstGeom>
+          <a:noFill/>
+        </p:spPr>
+        <p:txBody>
+          <a:bodyPr wrap="square" rtlCol="0">
+            <a:spAutoFit/>
+          </a:bodyPr>
+          <a:lstStyle/>
+          <a:p>
+            <a:pPr algn="ctr"/>
+            <a:r>
+              <a:rPr lang="en-US" sz="3200" b="1" dirty="0">
+                <a:solidFill>
+                  <a:srgbClr val="660033"/>
+                </a:solidFill>
+                <a:latin typeface="+mj-lt"/>
+                <a:ea typeface="Microsoft JhengHei" panose="020B0604030504040204" pitchFamily="34" charset="-120"/>
+              </a:rPr>
+              <a:t>( </a:t>
+            </a:r>
+            <a:r>
+              <a:rPr lang="en-US" altLang="zh-CN" sz="3200" b="1" dirty="0">
+                <a:solidFill>
+                  <a:srgbClr val="660033"/>
+                </a:solidFill>
+                <a:latin typeface="+mj-lt"/>
+                <a:ea typeface="Microsoft JhengHei" panose="020B0604030504040204" pitchFamily="34" charset="-120"/>
+              </a:rPr>
+              <a:t>2 / 2</a:t>
+            </a:r>
+            <a:r>
+              <a:rPr lang="en-US" sz="3200" b="1" dirty="0">
+                <a:solidFill>
+                  <a:srgbClr val="660033"/>
+                </a:solidFill>
+                <a:latin typeface="+mj-lt"/>
+                <a:ea typeface="Microsoft JhengHei" panose="020B0604030504040204" pitchFamily="34" charset="-120"/>
+              </a:rPr>
+              <a:t> )</a:t>
+            </a:r>
+            <a:endParaRPr lang="vi-VN" sz="3200" b="1" dirty="0">
+              <a:solidFill>
+                <a:srgbClr val="660033"/>
+              </a:solidFill>
+              <a:latin typeface="+mj-lt"/>
+              <a:ea typeface="Microsoft JhengHei" panose="020B0604030504040204" pitchFamily="34" charset="-120"/>
+            </a:endParaRPr>
+          </a:p>
+        </p:txBody>
+      </p:sp>
+    </p:spTree>
+    <p:extLst>
+      <p:ext uri="{BB962C8B-B14F-4D97-AF65-F5344CB8AC3E}">
+        <p14:creationId xmlns:p14="http://schemas.microsoft.com/office/powerpoint/2010/main" val="4079763774"/>
+      </p:ext>
+    </p:extLst>
+  </p:cSld>
+  <p:clrMapOvr>
+    <a:masterClrMapping/>
+  </p:clrMapOvr>
+</p:sld>
+</file>
+
+<file path=ppt/slides/slide7.xml><?xml version="1.0" encoding="utf-8"?>
+<p:sld xmlns:a="http://schemas.openxmlformats.org/drawingml/2006/main" xmlns:r="http://schemas.openxmlformats.org/officeDocument/2006/relationships" xmlns:p="http://schemas.openxmlformats.org/presentationml/2006/main">
+  <p:cSld>
+    <p:spTree>
+      <p:nvGrpSpPr>
+        <p:cNvPr id="1" name="">
+          <a:extLst>
+            <a:ext uri="{FF2B5EF4-FFF2-40B4-BE49-F238E27FC236}">
+              <a16:creationId xmlns:a16="http://schemas.microsoft.com/office/drawing/2014/main" id="{E03E9ABA-7916-581C-782B-BA3404C07CE5}"/>
+            </a:ext>
+          </a:extLst>
+        </p:cNvPr>
+        <p:cNvGrpSpPr/>
+        <p:nvPr/>
+      </p:nvGrpSpPr>
+      <p:grpSpPr>
+        <a:xfrm>
+          <a:off x="0" y="0"/>
+          <a:ext cx="0" cy="0"/>
+          <a:chOff x="0" y="0"/>
+          <a:chExt cx="0" cy="0"/>
+        </a:xfrm>
+      </p:grpSpPr>
+      <p:sp>
+        <p:nvSpPr>
+          <p:cNvPr id="5" name="內容版面配置區 4">
+            <a:extLst>
+              <a:ext uri="{FF2B5EF4-FFF2-40B4-BE49-F238E27FC236}">
+                <a16:creationId xmlns:a16="http://schemas.microsoft.com/office/drawing/2014/main" id="{0BB7D11A-8699-7870-2563-44AD54A5FF7F}"/>
+              </a:ext>
+            </a:extLst>
+          </p:cNvPr>
+          <p:cNvSpPr>
+            <a:spLocks noGrp="1"/>
+          </p:cNvSpPr>
+          <p:nvPr>
+            <p:ph idx="1"/>
+          </p:nvPr>
+        </p:nvSpPr>
+        <p:spPr>
+          <a:xfrm>
+            <a:off x="0" y="2084851"/>
+            <a:ext cx="12192000" cy="2404863"/>
+          </a:xfrm>
+        </p:spPr>
+        <p:txBody>
+          <a:bodyPr anchor="ctr">
+            <a:normAutofit/>
+          </a:bodyPr>
+          <a:lstStyle/>
           <a:p>
             <a:pPr algn="ctr">
               <a:buNone/>
             </a:pPr>
             <a:r>
-              <a:rPr lang="zh-CN" altLang="en-US" sz="5400" dirty="0" smtClean="0"/>
-              <a:t>竭力作主工  主領路要跟緊</a:t>
-            </a:r>
-            <a:endParaRPr lang="en-US" altLang="zh-CN" sz="5400" dirty="0" smtClean="0"/>
+              <a:rPr lang="zh-TW" altLang="en-US" sz="6400" b="1" dirty="0">
+                <a:solidFill>
+                  <a:srgbClr val="660033"/>
+                </a:solidFill>
+                <a:latin typeface="微軟正黑體" pitchFamily="34" charset="-120"/>
+                <a:ea typeface="微軟正黑體" pitchFamily="34" charset="-120"/>
+              </a:rPr>
+              <a:t>竭力作主工   主領路要跟緊</a:t>
+            </a:r>
+            <a:endParaRPr lang="en-US" altLang="zh-TW" sz="6400" b="1" dirty="0">
+              <a:solidFill>
+                <a:srgbClr val="660033"/>
+              </a:solidFill>
+              <a:latin typeface="微軟正黑體" pitchFamily="34" charset="-120"/>
+              <a:ea typeface="微軟正黑體" pitchFamily="34" charset="-120"/>
+            </a:endParaRPr>
           </a:p>
           <a:p>
             <a:pPr algn="ctr">
               <a:buNone/>
             </a:pPr>
             <a:r>
-              <a:rPr lang="zh-CN" altLang="en-US" sz="5400" dirty="0" smtClean="0"/>
+              <a:rPr lang="zh-TW" altLang="en-US" sz="6400" b="1" dirty="0">
+                <a:solidFill>
+                  <a:srgbClr val="660033"/>
+                </a:solidFill>
+                <a:latin typeface="微軟正黑體" pitchFamily="34" charset="-120"/>
+                <a:ea typeface="微軟正黑體" pitchFamily="34" charset="-120"/>
+              </a:rPr>
               <a:t>常令神歡欣感激祂護蔭</a:t>
             </a:r>
-            <a:endParaRPr lang="zh-TW" altLang="en-US" sz="5400" dirty="0"/>
+          </a:p>
+        </p:txBody>
+      </p:sp>
+      <p:sp>
+        <p:nvSpPr>
+          <p:cNvPr id="3" name="TextBox 2">
+            <a:extLst>
+              <a:ext uri="{FF2B5EF4-FFF2-40B4-BE49-F238E27FC236}">
+                <a16:creationId xmlns:a16="http://schemas.microsoft.com/office/drawing/2014/main" id="{3186A1BE-1349-EF95-3E9F-74EC41D5DB00}"/>
+              </a:ext>
+            </a:extLst>
+          </p:cNvPr>
+          <p:cNvSpPr txBox="1"/>
+          <p:nvPr/>
+        </p:nvSpPr>
+        <p:spPr>
+          <a:xfrm>
+            <a:off x="0" y="5157193"/>
+            <a:ext cx="12192000" cy="584775"/>
+          </a:xfrm>
+          <a:prstGeom prst="rect">
+            <a:avLst/>
+          </a:prstGeom>
+          <a:noFill/>
+        </p:spPr>
+        <p:txBody>
+          <a:bodyPr wrap="square" rtlCol="0">
+            <a:spAutoFit/>
+          </a:bodyPr>
+          <a:lstStyle/>
+          <a:p>
+            <a:pPr algn="ctr"/>
+            <a:r>
+              <a:rPr lang="en-US" sz="3200" b="1" dirty="0">
+                <a:solidFill>
+                  <a:srgbClr val="660033"/>
+                </a:solidFill>
+                <a:latin typeface="+mj-lt"/>
+                <a:ea typeface="Microsoft JhengHei" panose="020B0604030504040204" pitchFamily="34" charset="-120"/>
+              </a:rPr>
+              <a:t>( </a:t>
+            </a:r>
+            <a:r>
+              <a:rPr lang="en-US" altLang="zh-CN" sz="3200" b="1" dirty="0">
+                <a:solidFill>
+                  <a:srgbClr val="660033"/>
+                </a:solidFill>
+                <a:latin typeface="+mj-lt"/>
+                <a:ea typeface="Microsoft JhengHei" panose="020B0604030504040204" pitchFamily="34" charset="-120"/>
+              </a:rPr>
+              <a:t>2 / 2</a:t>
+            </a:r>
+            <a:r>
+              <a:rPr lang="en-US" sz="3200" b="1" dirty="0">
+                <a:solidFill>
+                  <a:srgbClr val="660033"/>
+                </a:solidFill>
+                <a:latin typeface="+mj-lt"/>
+                <a:ea typeface="Microsoft JhengHei" panose="020B0604030504040204" pitchFamily="34" charset="-120"/>
+              </a:rPr>
+              <a:t> )</a:t>
+            </a:r>
+            <a:endParaRPr lang="vi-VN" sz="3200" b="1" dirty="0">
+              <a:solidFill>
+                <a:srgbClr val="660033"/>
+              </a:solidFill>
+              <a:latin typeface="+mj-lt"/>
+              <a:ea typeface="Microsoft JhengHei" panose="020B0604030504040204" pitchFamily="34" charset="-120"/>
+            </a:endParaRPr>
           </a:p>
         </p:txBody>
       </p:sp>
     </p:spTree>
+    <p:extLst>
+      <p:ext uri="{BB962C8B-B14F-4D97-AF65-F5344CB8AC3E}">
+        <p14:creationId xmlns:p14="http://schemas.microsoft.com/office/powerpoint/2010/main" val="2541585935"/>
+      </p:ext>
+    </p:extLst>
   </p:cSld>
   <p:clrMapOvr>
     <a:masterClrMapping/>
@@ -3423,7 +4164,7 @@
 </file>
 
 <file path=ppt/theme/theme1.xml><?xml version="1.0" encoding="utf-8"?>
-<a:theme xmlns:a="http://schemas.openxmlformats.org/drawingml/2006/main" name="佈景主題4">
+<a:theme xmlns:a="http://schemas.openxmlformats.org/drawingml/2006/main" name="Theme1">
   <a:themeElements>
     <a:clrScheme name="Office">
       <a:dk1>
@@ -3702,5 +4443,10 @@
   </a:themeElements>
   <a:objectDefaults/>
   <a:extraClrSchemeLst/>
+  <a:extLst>
+    <a:ext uri="{05A4C25C-085E-4340-85A3-A5531E510DB2}">
+      <thm15:themeFamily xmlns:thm15="http://schemas.microsoft.com/office/thememl/2012/main" name="Theme1" id="{384ED68F-161E-4EC5-AA47-8343C2AC128D}" vid="{FD3E678D-D6FA-4147-A139-1A6315ADEDC3}"/>
+    </a:ext>
+  </a:extLst>
 </a:theme>
 </file>